--- a/ZSD/Prezentacja.pptx
+++ b/ZSD/Prezentacja.pptx
@@ -5,7 +5,7 @@
     <p:sldMasterId id="2147483648" r:id="rId1"/>
   </p:sldMasterIdLst>
   <p:notesMasterIdLst>
-    <p:notesMasterId r:id="rId39"/>
+    <p:notesMasterId r:id="rId40"/>
   </p:notesMasterIdLst>
   <p:sldIdLst>
     <p:sldId id="256" r:id="rId2"/>
@@ -16,35 +16,36 @@
     <p:sldId id="285" r:id="rId7"/>
     <p:sldId id="286" r:id="rId8"/>
     <p:sldId id="261" r:id="rId9"/>
-    <p:sldId id="264" r:id="rId10"/>
-    <p:sldId id="268" r:id="rId11"/>
-    <p:sldId id="269" r:id="rId12"/>
-    <p:sldId id="266" r:id="rId13"/>
-    <p:sldId id="291" r:id="rId14"/>
-    <p:sldId id="292" r:id="rId15"/>
-    <p:sldId id="300" r:id="rId16"/>
-    <p:sldId id="290" r:id="rId17"/>
-    <p:sldId id="280" r:id="rId18"/>
-    <p:sldId id="270" r:id="rId19"/>
-    <p:sldId id="272" r:id="rId20"/>
-    <p:sldId id="273" r:id="rId21"/>
-    <p:sldId id="274" r:id="rId22"/>
-    <p:sldId id="275" r:id="rId23"/>
-    <p:sldId id="276" r:id="rId24"/>
-    <p:sldId id="277" r:id="rId25"/>
-    <p:sldId id="282" r:id="rId26"/>
-    <p:sldId id="284" r:id="rId27"/>
-    <p:sldId id="267" r:id="rId28"/>
-    <p:sldId id="287" r:id="rId29"/>
-    <p:sldId id="288" r:id="rId30"/>
-    <p:sldId id="289" r:id="rId31"/>
-    <p:sldId id="295" r:id="rId32"/>
-    <p:sldId id="296" r:id="rId33"/>
-    <p:sldId id="297" r:id="rId34"/>
-    <p:sldId id="298" r:id="rId35"/>
-    <p:sldId id="299" r:id="rId36"/>
-    <p:sldId id="258" r:id="rId37"/>
-    <p:sldId id="259" r:id="rId38"/>
+    <p:sldId id="301" r:id="rId10"/>
+    <p:sldId id="264" r:id="rId11"/>
+    <p:sldId id="268" r:id="rId12"/>
+    <p:sldId id="269" r:id="rId13"/>
+    <p:sldId id="266" r:id="rId14"/>
+    <p:sldId id="291" r:id="rId15"/>
+    <p:sldId id="292" r:id="rId16"/>
+    <p:sldId id="300" r:id="rId17"/>
+    <p:sldId id="290" r:id="rId18"/>
+    <p:sldId id="280" r:id="rId19"/>
+    <p:sldId id="270" r:id="rId20"/>
+    <p:sldId id="272" r:id="rId21"/>
+    <p:sldId id="273" r:id="rId22"/>
+    <p:sldId id="274" r:id="rId23"/>
+    <p:sldId id="275" r:id="rId24"/>
+    <p:sldId id="276" r:id="rId25"/>
+    <p:sldId id="277" r:id="rId26"/>
+    <p:sldId id="282" r:id="rId27"/>
+    <p:sldId id="284" r:id="rId28"/>
+    <p:sldId id="267" r:id="rId29"/>
+    <p:sldId id="287" r:id="rId30"/>
+    <p:sldId id="288" r:id="rId31"/>
+    <p:sldId id="289" r:id="rId32"/>
+    <p:sldId id="295" r:id="rId33"/>
+    <p:sldId id="296" r:id="rId34"/>
+    <p:sldId id="297" r:id="rId35"/>
+    <p:sldId id="298" r:id="rId36"/>
+    <p:sldId id="299" r:id="rId37"/>
+    <p:sldId id="258" r:id="rId38"/>
+    <p:sldId id="259" r:id="rId39"/>
   </p:sldIdLst>
   <p:sldSz cx="12192000" cy="6858000"/>
   <p:notesSz cx="6858000" cy="9144000"/>
@@ -160,6 +161,7 @@
             <p14:sldId id="285"/>
             <p14:sldId id="286"/>
             <p14:sldId id="261"/>
+            <p14:sldId id="301"/>
           </p14:sldIdLst>
         </p14:section>
         <p14:section name="Rozw. struktury" id="{0A37D99C-1A3E-413C-9542-E5C0FC31F32F}">
@@ -1522,7 +1524,7 @@
           <a:p>
             <a:fld id="{3B2DCAA4-B62D-46C5-877A-19CB30F0B4EF}" type="slidenum">
               <a:rPr lang="pl-PL" smtClean="0"/>
-              <a:t>9</a:t>
+              <a:t>10</a:t>
             </a:fld>
             <a:endParaRPr lang="pl-PL"/>
           </a:p>
@@ -4526,6 +4528,196 @@
       </p:grpSpPr>
       <p:sp>
         <p:nvSpPr>
+          <p:cNvPr id="4" name="Tytuł 3">
+            <a:extLst>
+              <a:ext uri="{FF2B5EF4-FFF2-40B4-BE49-F238E27FC236}">
+                <a16:creationId xmlns:a16="http://schemas.microsoft.com/office/drawing/2014/main" id="{C1F483C1-7FBE-A421-5A4F-53D7EC593AB1}"/>
+              </a:ext>
+            </a:extLst>
+          </p:cNvPr>
+          <p:cNvSpPr>
+            <a:spLocks noGrp="1"/>
+          </p:cNvSpPr>
+          <p:nvPr>
+            <p:ph type="title"/>
+          </p:nvPr>
+        </p:nvSpPr>
+        <p:spPr/>
+        <p:txBody>
+          <a:bodyPr>
+            <a:normAutofit/>
+          </a:bodyPr>
+          <a:lstStyle/>
+          <a:p>
+            <a:pPr algn="ctr"/>
+            <a:r>
+              <a:rPr lang="pl-PL" sz="4000" b="1" dirty="0" err="1">
+                <a:latin typeface="Arial" panose="020B0604020202020204" pitchFamily="34" charset="0"/>
+                <a:cs typeface="Arial" panose="020B0604020202020204" pitchFamily="34" charset="0"/>
+              </a:rPr>
+              <a:t>HashTable</a:t>
+            </a:r>
+            <a:r>
+              <a:rPr lang="pl-PL" sz="4000" b="1" dirty="0">
+                <a:latin typeface="Arial" panose="020B0604020202020204" pitchFamily="34" charset="0"/>
+                <a:cs typeface="Arial" panose="020B0604020202020204" pitchFamily="34" charset="0"/>
+              </a:rPr>
+              <a:t> – koncept</a:t>
+            </a:r>
+          </a:p>
+        </p:txBody>
+      </p:sp>
+      <p:sp>
+        <p:nvSpPr>
+          <p:cNvPr id="5" name="Symbol zastępczy zawartości 4">
+            <a:extLst>
+              <a:ext uri="{FF2B5EF4-FFF2-40B4-BE49-F238E27FC236}">
+                <a16:creationId xmlns:a16="http://schemas.microsoft.com/office/drawing/2014/main" id="{336F499D-5039-FEC0-72BA-478C8AC214B8}"/>
+              </a:ext>
+            </a:extLst>
+          </p:cNvPr>
+          <p:cNvSpPr>
+            <a:spLocks noGrp="1"/>
+          </p:cNvSpPr>
+          <p:nvPr>
+            <p:ph sz="half" idx="1"/>
+          </p:nvPr>
+        </p:nvSpPr>
+        <p:spPr/>
+        <p:txBody>
+          <a:bodyPr>
+            <a:normAutofit/>
+          </a:bodyPr>
+          <a:lstStyle/>
+          <a:p>
+            <a:pPr>
+              <a:buFont typeface="Wingdings" panose="05000000000000000000" pitchFamily="2" charset="2"/>
+              <a:buChar char="Ø"/>
+            </a:pPr>
+            <a:r>
+              <a:rPr lang="pl-PL" sz="1600" b="1" dirty="0" err="1"/>
+              <a:t>HashTable</a:t>
+            </a:r>
+            <a:r>
+              <a:rPr lang="pl-PL" sz="1600" dirty="0"/>
+              <a:t> </a:t>
+            </a:r>
+            <a:r>
+              <a:rPr lang="pl-PL" sz="1600" u="sng" dirty="0">
+                <a:solidFill>
+                  <a:srgbClr val="FF0000"/>
+                </a:solidFill>
+              </a:rPr>
+              <a:t>nie</a:t>
+            </a:r>
+            <a:r>
+              <a:rPr lang="pl-PL" sz="1600" dirty="0"/>
+              <a:t> jest konkretną implementacją, lecz ogólną strukturą danych (konceptem) opartą na haszowaniu.</a:t>
+            </a:r>
+          </a:p>
+          <a:p>
+            <a:pPr>
+              <a:buFont typeface="Wingdings" panose="05000000000000000000" pitchFamily="2" charset="2"/>
+              <a:buChar char="Ø"/>
+            </a:pPr>
+            <a:r>
+              <a:rPr lang="pl-PL" sz="1600" dirty="0"/>
+              <a:t>Faktycznymi strukturami danych implementującymi ten koncept są:</a:t>
+            </a:r>
+            <a:endParaRPr lang="pl-PL" sz="1200" dirty="0">
+              <a:latin typeface="Arial" panose="020B0604020202020204" pitchFamily="34" charset="0"/>
+              <a:cs typeface="Arial" panose="020B0604020202020204" pitchFamily="34" charset="0"/>
+            </a:endParaRPr>
+          </a:p>
+          <a:p>
+            <a:pPr lvl="1">
+              <a:buFont typeface="Wingdings" panose="05000000000000000000" pitchFamily="2" charset="2"/>
+              <a:buChar char="Ø"/>
+            </a:pPr>
+            <a:r>
+              <a:rPr lang="pl-PL" sz="1200" b="1" dirty="0" err="1">
+                <a:latin typeface="Arial" panose="020B0604020202020204" pitchFamily="34" charset="0"/>
+                <a:cs typeface="Arial" panose="020B0604020202020204" pitchFamily="34" charset="0"/>
+              </a:rPr>
+              <a:t>HashMap</a:t>
+            </a:r>
+            <a:r>
+              <a:rPr lang="pl-PL" sz="1200" b="1" dirty="0">
+                <a:latin typeface="Arial" panose="020B0604020202020204" pitchFamily="34" charset="0"/>
+                <a:cs typeface="Arial" panose="020B0604020202020204" pitchFamily="34" charset="0"/>
+              </a:rPr>
+              <a:t> (</a:t>
+            </a:r>
+            <a:r>
+              <a:rPr lang="pl-PL" sz="1200" b="1" dirty="0" err="1">
+                <a:latin typeface="Arial" panose="020B0604020202020204" pitchFamily="34" charset="0"/>
+                <a:cs typeface="Arial" panose="020B0604020202020204" pitchFamily="34" charset="0"/>
+              </a:rPr>
+              <a:t>dict</a:t>
+            </a:r>
+            <a:r>
+              <a:rPr lang="pl-PL" sz="1200" b="1" dirty="0">
+                <a:latin typeface="Arial" panose="020B0604020202020204" pitchFamily="34" charset="0"/>
+                <a:cs typeface="Arial" panose="020B0604020202020204" pitchFamily="34" charset="0"/>
+              </a:rPr>
+              <a:t>)</a:t>
+            </a:r>
+          </a:p>
+          <a:p>
+            <a:pPr lvl="1">
+              <a:buFont typeface="Wingdings" panose="05000000000000000000" pitchFamily="2" charset="2"/>
+              <a:buChar char="Ø"/>
+            </a:pPr>
+            <a:r>
+              <a:rPr lang="pl-PL" sz="1200" b="1" dirty="0" err="1">
+                <a:latin typeface="Arial" panose="020B0604020202020204" pitchFamily="34" charset="0"/>
+                <a:cs typeface="Arial" panose="020B0604020202020204" pitchFamily="34" charset="0"/>
+              </a:rPr>
+              <a:t>HashSet</a:t>
+            </a:r>
+            <a:r>
+              <a:rPr lang="pl-PL" sz="1200" b="1" dirty="0">
+                <a:latin typeface="Arial" panose="020B0604020202020204" pitchFamily="34" charset="0"/>
+                <a:cs typeface="Arial" panose="020B0604020202020204" pitchFamily="34" charset="0"/>
+              </a:rPr>
+              <a:t> (set)</a:t>
+            </a:r>
+            <a:endParaRPr lang="pl-PL" sz="1200" b="1" dirty="0"/>
+          </a:p>
+        </p:txBody>
+      </p:sp>
+    </p:spTree>
+    <p:extLst>
+      <p:ext uri="{BB962C8B-B14F-4D97-AF65-F5344CB8AC3E}">
+        <p14:creationId xmlns:p14="http://schemas.microsoft.com/office/powerpoint/2010/main" val="988880070"/>
+      </p:ext>
+    </p:extLst>
+  </p:cSld>
+  <p:clrMapOvr>
+    <a:masterClrMapping/>
+  </p:clrMapOvr>
+</p:sld>
+</file>
+
+<file path=ppt/slides/slide11.xml><?xml version="1.0" encoding="utf-8"?>
+<p:sld xmlns:a="http://schemas.openxmlformats.org/drawingml/2006/main" xmlns:r="http://schemas.openxmlformats.org/officeDocument/2006/relationships" xmlns:p="http://schemas.openxmlformats.org/presentationml/2006/main">
+  <p:cSld>
+    <p:spTree>
+      <p:nvGrpSpPr>
+        <p:cNvPr id="1" name=""/>
+        <p:cNvGrpSpPr/>
+        <p:nvPr/>
+      </p:nvGrpSpPr>
+      <p:grpSpPr>
+        <a:xfrm>
+          <a:off x="0" y="0"/>
+          <a:ext cx="0" cy="0"/>
+          <a:chOff x="0" y="0"/>
+          <a:chExt cx="0" cy="0"/>
+        </a:xfrm>
+      </p:grpSpPr>
+      <p:sp>
+        <p:nvSpPr>
           <p:cNvPr id="2" name="Tytuł 1">
             <a:extLst>
               <a:ext uri="{FF2B5EF4-FFF2-40B4-BE49-F238E27FC236}">
@@ -4736,7 +4928,7 @@
 </p:sld>
 </file>
 
-<file path=ppt/slides/slide11.xml><?xml version="1.0" encoding="utf-8"?>
+<file path=ppt/slides/slide12.xml><?xml version="1.0" encoding="utf-8"?>
 <p:sld xmlns:a="http://schemas.openxmlformats.org/drawingml/2006/main" xmlns:r="http://schemas.openxmlformats.org/officeDocument/2006/relationships" xmlns:p="http://schemas.openxmlformats.org/presentationml/2006/main">
   <p:cSld>
     <p:spTree>
@@ -5019,7 +5211,7 @@
 </p:sld>
 </file>
 
-<file path=ppt/slides/slide12.xml><?xml version="1.0" encoding="utf-8"?>
+<file path=ppt/slides/slide13.xml><?xml version="1.0" encoding="utf-8"?>
 <p:sld xmlns:a="http://schemas.openxmlformats.org/drawingml/2006/main" xmlns:r="http://schemas.openxmlformats.org/officeDocument/2006/relationships" xmlns:p="http://schemas.openxmlformats.org/presentationml/2006/main">
   <p:cSld>
     <p:spTree>
@@ -5458,6 +5650,53 @@
           </a:p>
         </p:txBody>
       </p:sp>
+      <p:pic>
+        <p:nvPicPr>
+          <p:cNvPr id="2050" name="Picture 2" descr="Union-Find algorithms in Ruby">
+            <a:extLst>
+              <a:ext uri="{FF2B5EF4-FFF2-40B4-BE49-F238E27FC236}">
+                <a16:creationId xmlns:a16="http://schemas.microsoft.com/office/drawing/2014/main" id="{81B1699B-305D-566C-A7C7-505E0D167532}"/>
+              </a:ext>
+            </a:extLst>
+          </p:cNvPr>
+          <p:cNvPicPr>
+            <a:picLocks noChangeAspect="1" noChangeArrowheads="1"/>
+          </p:cNvPicPr>
+          <p:nvPr/>
+        </p:nvPicPr>
+        <p:blipFill>
+          <a:blip r:embed="rId2" cstate="print">
+            <a:extLst>
+              <a:ext uri="{28A0092B-C50C-407E-A947-70E740481C1C}">
+                <a14:useLocalDpi xmlns:a14="http://schemas.microsoft.com/office/drawing/2010/main" val="0"/>
+              </a:ext>
+            </a:extLst>
+          </a:blip>
+          <a:srcRect/>
+          <a:stretch>
+            <a:fillRect/>
+          </a:stretch>
+        </p:blipFill>
+        <p:spPr bwMode="auto">
+          <a:xfrm>
+            <a:off x="6019800" y="1938577"/>
+            <a:ext cx="5413676" cy="4125433"/>
+          </a:xfrm>
+          <a:prstGeom prst="rect">
+            <a:avLst/>
+          </a:prstGeom>
+          <a:noFill/>
+          <a:extLst>
+            <a:ext uri="{909E8E84-426E-40DD-AFC4-6F175D3DCCD1}">
+              <a14:hiddenFill xmlns:a14="http://schemas.microsoft.com/office/drawing/2010/main">
+                <a:solidFill>
+                  <a:srgbClr val="FFFFFF"/>
+                </a:solidFill>
+              </a14:hiddenFill>
+            </a:ext>
+          </a:extLst>
+        </p:spPr>
+      </p:pic>
     </p:spTree>
     <p:extLst>
       <p:ext uri="{BB962C8B-B14F-4D97-AF65-F5344CB8AC3E}">
@@ -5471,7 +5710,7 @@
 </p:sld>
 </file>
 
-<file path=ppt/slides/slide13.xml><?xml version="1.0" encoding="utf-8"?>
+<file path=ppt/slides/slide14.xml><?xml version="1.0" encoding="utf-8"?>
 <p:sld xmlns:a="http://schemas.openxmlformats.org/drawingml/2006/main" xmlns:r="http://schemas.openxmlformats.org/officeDocument/2006/relationships" xmlns:p="http://schemas.openxmlformats.org/presentationml/2006/main">
   <p:cSld>
     <p:spTree>
@@ -5591,8 +5830,8 @@
         </p:blipFill>
         <p:spPr>
           <a:xfrm>
-            <a:off x="174091" y="1690688"/>
-            <a:ext cx="3462027" cy="5122517"/>
+            <a:off x="174091" y="1589874"/>
+            <a:ext cx="3530162" cy="5223332"/>
           </a:xfrm>
           <a:prstGeom prst="rect">
             <a:avLst/>
@@ -5642,7 +5881,7 @@
 </p:sld>
 </file>
 
-<file path=ppt/slides/slide14.xml><?xml version="1.0" encoding="utf-8"?>
+<file path=ppt/slides/slide15.xml><?xml version="1.0" encoding="utf-8"?>
 <p:sld xmlns:a="http://schemas.openxmlformats.org/drawingml/2006/main" xmlns:r="http://schemas.openxmlformats.org/officeDocument/2006/relationships" xmlns:p="http://schemas.openxmlformats.org/presentationml/2006/main">
   <p:cSld>
     <p:spTree>
@@ -6337,7 +6576,7 @@
 </p:sld>
 </file>
 
-<file path=ppt/slides/slide15.xml><?xml version="1.0" encoding="utf-8"?>
+<file path=ppt/slides/slide16.xml><?xml version="1.0" encoding="utf-8"?>
 <p:sld xmlns:a="http://schemas.openxmlformats.org/drawingml/2006/main" xmlns:r="http://schemas.openxmlformats.org/officeDocument/2006/relationships" xmlns:p="http://schemas.openxmlformats.org/presentationml/2006/main">
   <p:cSld>
     <p:spTree>
@@ -6527,7 +6766,7 @@
 </p:sld>
 </file>
 
-<file path=ppt/slides/slide16.xml><?xml version="1.0" encoding="utf-8"?>
+<file path=ppt/slides/slide17.xml><?xml version="1.0" encoding="utf-8"?>
 <p:sld xmlns:a="http://schemas.openxmlformats.org/drawingml/2006/main" xmlns:r="http://schemas.openxmlformats.org/officeDocument/2006/relationships" xmlns:p="http://schemas.openxmlformats.org/presentationml/2006/main">
   <p:cSld>
     <p:spTree>
@@ -6932,7 +7171,7 @@
 </p:sld>
 </file>
 
-<file path=ppt/slides/slide17.xml><?xml version="1.0" encoding="utf-8"?>
+<file path=ppt/slides/slide18.xml><?xml version="1.0" encoding="utf-8"?>
 <p:sld xmlns:a="http://schemas.openxmlformats.org/drawingml/2006/main" xmlns:r="http://schemas.openxmlformats.org/officeDocument/2006/relationships" xmlns:p="http://schemas.openxmlformats.org/presentationml/2006/main">
   <p:cSld>
     <p:spTree>
@@ -7205,7 +7444,7 @@
 </p:sld>
 </file>
 
-<file path=ppt/slides/slide18.xml><?xml version="1.0" encoding="utf-8"?>
+<file path=ppt/slides/slide19.xml><?xml version="1.0" encoding="utf-8"?>
 <p:sld xmlns:a="http://schemas.openxmlformats.org/drawingml/2006/main" xmlns:r="http://schemas.openxmlformats.org/officeDocument/2006/relationships" xmlns:p="http://schemas.openxmlformats.org/presentationml/2006/main">
   <p:cSld>
     <p:spTree>
@@ -7685,7 +7924,774 @@
 </p:sld>
 </file>
 
-<file path=ppt/slides/slide19.xml><?xml version="1.0" encoding="utf-8"?>
+<file path=ppt/slides/slide2.xml><?xml version="1.0" encoding="utf-8"?>
+<p:sld xmlns:a="http://schemas.openxmlformats.org/drawingml/2006/main" xmlns:r="http://schemas.openxmlformats.org/officeDocument/2006/relationships" xmlns:p="http://schemas.openxmlformats.org/presentationml/2006/main">
+  <p:cSld>
+    <p:spTree>
+      <p:nvGrpSpPr>
+        <p:cNvPr id="1" name=""/>
+        <p:cNvGrpSpPr/>
+        <p:nvPr/>
+      </p:nvGrpSpPr>
+      <p:grpSpPr>
+        <a:xfrm>
+          <a:off x="0" y="0"/>
+          <a:ext cx="0" cy="0"/>
+          <a:chOff x="0" y="0"/>
+          <a:chExt cx="0" cy="0"/>
+        </a:xfrm>
+      </p:grpSpPr>
+      <p:sp>
+        <p:nvSpPr>
+          <p:cNvPr id="2" name="Title 1">
+            <a:extLst>
+              <a:ext uri="{FF2B5EF4-FFF2-40B4-BE49-F238E27FC236}">
+                <a16:creationId xmlns:a16="http://schemas.microsoft.com/office/drawing/2014/main" id="{121ED55C-3F86-B39B-CA5C-D0F09AC6DC4B}"/>
+              </a:ext>
+            </a:extLst>
+          </p:cNvPr>
+          <p:cNvSpPr>
+            <a:spLocks noGrp="1"/>
+          </p:cNvSpPr>
+          <p:nvPr>
+            <p:ph type="title"/>
+          </p:nvPr>
+        </p:nvSpPr>
+        <p:spPr/>
+        <p:txBody>
+          <a:bodyPr/>
+          <a:lstStyle/>
+          <a:p>
+            <a:pPr algn="ctr"/>
+            <a:r>
+              <a:rPr lang="en-US" b="1" dirty="0">
+                <a:latin typeface="Arial" panose="020B0604020202020204" pitchFamily="34" charset="0"/>
+                <a:cs typeface="Arial" panose="020B0604020202020204" pitchFamily="34" charset="0"/>
+              </a:rPr>
+              <a:t>Plan </a:t>
+            </a:r>
+            <a:r>
+              <a:rPr lang="en-US" b="1" dirty="0" err="1">
+                <a:latin typeface="Arial" panose="020B0604020202020204" pitchFamily="34" charset="0"/>
+                <a:cs typeface="Arial" panose="020B0604020202020204" pitchFamily="34" charset="0"/>
+              </a:rPr>
+              <a:t>prezentacji</a:t>
+            </a:r>
+            <a:r>
+              <a:rPr lang="en-US" b="1" dirty="0">
+                <a:latin typeface="Arial" panose="020B0604020202020204" pitchFamily="34" charset="0"/>
+                <a:cs typeface="Arial" panose="020B0604020202020204" pitchFamily="34" charset="0"/>
+              </a:rPr>
+              <a:t> </a:t>
+            </a:r>
+          </a:p>
+        </p:txBody>
+      </p:sp>
+      <p:sp>
+        <p:nvSpPr>
+          <p:cNvPr id="3" name="Content Placeholder 2">
+            <a:extLst>
+              <a:ext uri="{FF2B5EF4-FFF2-40B4-BE49-F238E27FC236}">
+                <a16:creationId xmlns:a16="http://schemas.microsoft.com/office/drawing/2014/main" id="{5D40D6B6-F404-BC45-4840-866A1A801607}"/>
+              </a:ext>
+            </a:extLst>
+          </p:cNvPr>
+          <p:cNvSpPr>
+            <a:spLocks noGrp="1"/>
+          </p:cNvSpPr>
+          <p:nvPr>
+            <p:ph idx="1"/>
+          </p:nvPr>
+        </p:nvSpPr>
+        <p:spPr/>
+        <p:txBody>
+          <a:bodyPr vert="horz" lIns="91440" tIns="45720" rIns="91440" bIns="45720" rtlCol="0" anchor="t">
+            <a:normAutofit fontScale="92500" lnSpcReduction="10000"/>
+          </a:bodyPr>
+          <a:lstStyle/>
+          <a:p>
+            <a:pPr>
+              <a:buFont typeface="Wingdings" panose="05000000000000000000" pitchFamily="2" charset="2"/>
+              <a:buChar char="Ø"/>
+            </a:pPr>
+            <a:r>
+              <a:rPr lang="pl-PL" sz="1700" b="1" dirty="0">
+                <a:solidFill>
+                  <a:srgbClr val="000000"/>
+                </a:solidFill>
+                <a:latin typeface="Arial" panose="020B0604020202020204" pitchFamily="34" charset="0"/>
+                <a:ea typeface="Calibri"/>
+                <a:cs typeface="Arial" panose="020B0604020202020204" pitchFamily="34" charset="0"/>
+              </a:rPr>
+              <a:t> Podstawowe struktury:</a:t>
+            </a:r>
+          </a:p>
+          <a:p>
+            <a:pPr lvl="1">
+              <a:buFont typeface="Wingdings" panose="05000000000000000000" pitchFamily="2" charset="2"/>
+              <a:buChar char="Ø"/>
+            </a:pPr>
+            <a:r>
+              <a:rPr lang="pl-PL" sz="1300" b="1" dirty="0">
+                <a:solidFill>
+                  <a:srgbClr val="000000"/>
+                </a:solidFill>
+                <a:latin typeface="Arial" panose="020B0604020202020204" pitchFamily="34" charset="0"/>
+                <a:ea typeface="Calibri"/>
+                <a:cs typeface="Arial" panose="020B0604020202020204" pitchFamily="34" charset="0"/>
+              </a:rPr>
+              <a:t>Stos (</a:t>
+            </a:r>
+            <a:r>
+              <a:rPr lang="pl-PL" sz="1300" b="1" dirty="0" err="1">
+                <a:solidFill>
+                  <a:srgbClr val="000000"/>
+                </a:solidFill>
+                <a:latin typeface="Arial" panose="020B0604020202020204" pitchFamily="34" charset="0"/>
+                <a:ea typeface="Calibri"/>
+                <a:cs typeface="Arial" panose="020B0604020202020204" pitchFamily="34" charset="0"/>
+              </a:rPr>
+              <a:t>Stack</a:t>
+            </a:r>
+            <a:r>
+              <a:rPr lang="pl-PL" sz="1300" b="1" dirty="0">
+                <a:solidFill>
+                  <a:srgbClr val="000000"/>
+                </a:solidFill>
+                <a:latin typeface="Arial" panose="020B0604020202020204" pitchFamily="34" charset="0"/>
+                <a:ea typeface="Calibri"/>
+                <a:cs typeface="Arial" panose="020B0604020202020204" pitchFamily="34" charset="0"/>
+              </a:rPr>
+              <a:t>) i kolejka (Queue)</a:t>
+            </a:r>
+          </a:p>
+          <a:p>
+            <a:pPr lvl="1">
+              <a:buFont typeface="Wingdings" panose="05000000000000000000" pitchFamily="2" charset="2"/>
+              <a:buChar char="Ø"/>
+            </a:pPr>
+            <a:r>
+              <a:rPr lang="pl-PL" sz="1300" b="1" dirty="0">
+                <a:solidFill>
+                  <a:srgbClr val="000000"/>
+                </a:solidFill>
+                <a:latin typeface="Arial" panose="020B0604020202020204" pitchFamily="34" charset="0"/>
+                <a:ea typeface="Calibri"/>
+                <a:cs typeface="Arial" panose="020B0604020202020204" pitchFamily="34" charset="0"/>
+              </a:rPr>
+              <a:t>Lista jednokierunkowa (</a:t>
+            </a:r>
+            <a:r>
+              <a:rPr lang="pl-PL" sz="1300" b="1" dirty="0" err="1">
+                <a:solidFill>
+                  <a:srgbClr val="000000"/>
+                </a:solidFill>
+                <a:latin typeface="Arial" panose="020B0604020202020204" pitchFamily="34" charset="0"/>
+                <a:ea typeface="Calibri"/>
+                <a:cs typeface="Arial" panose="020B0604020202020204" pitchFamily="34" charset="0"/>
+              </a:rPr>
+              <a:t>Linked</a:t>
+            </a:r>
+            <a:r>
+              <a:rPr lang="pl-PL" sz="1300" b="1" dirty="0">
+                <a:solidFill>
+                  <a:srgbClr val="000000"/>
+                </a:solidFill>
+                <a:latin typeface="Arial" panose="020B0604020202020204" pitchFamily="34" charset="0"/>
+                <a:ea typeface="Calibri"/>
+                <a:cs typeface="Arial" panose="020B0604020202020204" pitchFamily="34" charset="0"/>
+              </a:rPr>
+              <a:t> List)</a:t>
+            </a:r>
+          </a:p>
+          <a:p>
+            <a:pPr lvl="1">
+              <a:buFont typeface="Wingdings" panose="05000000000000000000" pitchFamily="2" charset="2"/>
+              <a:buChar char="Ø"/>
+            </a:pPr>
+            <a:r>
+              <a:rPr lang="pl-PL" sz="1300" b="1" dirty="0">
+                <a:solidFill>
+                  <a:srgbClr val="000000"/>
+                </a:solidFill>
+                <a:latin typeface="Arial" panose="020B0604020202020204" pitchFamily="34" charset="0"/>
+                <a:ea typeface="Calibri"/>
+                <a:cs typeface="Arial" panose="020B0604020202020204" pitchFamily="34" charset="0"/>
+              </a:rPr>
+              <a:t>Drzewo poszukiwań binarnych (</a:t>
+            </a:r>
+            <a:r>
+              <a:rPr lang="pl-PL" sz="1300" b="1" dirty="0" err="1">
+                <a:solidFill>
+                  <a:srgbClr val="000000"/>
+                </a:solidFill>
+                <a:latin typeface="Arial" panose="020B0604020202020204" pitchFamily="34" charset="0"/>
+                <a:ea typeface="Calibri"/>
+                <a:cs typeface="Arial" panose="020B0604020202020204" pitchFamily="34" charset="0"/>
+              </a:rPr>
+              <a:t>Binary</a:t>
+            </a:r>
+            <a:r>
+              <a:rPr lang="pl-PL" sz="1300" b="1" dirty="0">
+                <a:solidFill>
+                  <a:srgbClr val="000000"/>
+                </a:solidFill>
+                <a:latin typeface="Arial" panose="020B0604020202020204" pitchFamily="34" charset="0"/>
+                <a:ea typeface="Calibri"/>
+                <a:cs typeface="Arial" panose="020B0604020202020204" pitchFamily="34" charset="0"/>
+              </a:rPr>
+              <a:t> </a:t>
+            </a:r>
+            <a:r>
+              <a:rPr lang="pl-PL" sz="1300" b="1" dirty="0" err="1">
+                <a:solidFill>
+                  <a:srgbClr val="000000"/>
+                </a:solidFill>
+                <a:latin typeface="Arial" panose="020B0604020202020204" pitchFamily="34" charset="0"/>
+                <a:ea typeface="Calibri"/>
+                <a:cs typeface="Arial" panose="020B0604020202020204" pitchFamily="34" charset="0"/>
+              </a:rPr>
+              <a:t>Search</a:t>
+            </a:r>
+            <a:r>
+              <a:rPr lang="pl-PL" sz="1300" b="1" dirty="0">
+                <a:solidFill>
+                  <a:srgbClr val="000000"/>
+                </a:solidFill>
+                <a:latin typeface="Arial" panose="020B0604020202020204" pitchFamily="34" charset="0"/>
+                <a:ea typeface="Calibri"/>
+                <a:cs typeface="Arial" panose="020B0604020202020204" pitchFamily="34" charset="0"/>
+              </a:rPr>
+              <a:t> </a:t>
+            </a:r>
+            <a:r>
+              <a:rPr lang="pl-PL" sz="1300" b="1" dirty="0" err="1">
+                <a:solidFill>
+                  <a:srgbClr val="000000"/>
+                </a:solidFill>
+                <a:latin typeface="Arial" panose="020B0604020202020204" pitchFamily="34" charset="0"/>
+                <a:ea typeface="Calibri"/>
+                <a:cs typeface="Arial" panose="020B0604020202020204" pitchFamily="34" charset="0"/>
+              </a:rPr>
+              <a:t>Tree</a:t>
+            </a:r>
+            <a:r>
+              <a:rPr lang="pl-PL" sz="1300" b="1" dirty="0">
+                <a:solidFill>
+                  <a:srgbClr val="000000"/>
+                </a:solidFill>
+                <a:latin typeface="Arial" panose="020B0604020202020204" pitchFamily="34" charset="0"/>
+                <a:ea typeface="Calibri"/>
+                <a:cs typeface="Arial" panose="020B0604020202020204" pitchFamily="34" charset="0"/>
+              </a:rPr>
+              <a:t> – </a:t>
+            </a:r>
+            <a:r>
+              <a:rPr lang="pl-PL" sz="1300" b="1" dirty="0" err="1">
+                <a:solidFill>
+                  <a:srgbClr val="000000"/>
+                </a:solidFill>
+                <a:latin typeface="Arial" panose="020B0604020202020204" pitchFamily="34" charset="0"/>
+                <a:ea typeface="Calibri"/>
+                <a:cs typeface="Arial" panose="020B0604020202020204" pitchFamily="34" charset="0"/>
+              </a:rPr>
+              <a:t>BST</a:t>
+            </a:r>
+            <a:r>
+              <a:rPr lang="pl-PL" sz="1300" b="1" dirty="0">
+                <a:solidFill>
+                  <a:srgbClr val="000000"/>
+                </a:solidFill>
+                <a:latin typeface="Arial" panose="020B0604020202020204" pitchFamily="34" charset="0"/>
+                <a:ea typeface="Calibri"/>
+                <a:cs typeface="Arial" panose="020B0604020202020204" pitchFamily="34" charset="0"/>
+              </a:rPr>
+              <a:t>)</a:t>
+            </a:r>
+            <a:br>
+              <a:rPr lang="pl-PL" sz="1600" b="1" dirty="0">
+                <a:solidFill>
+                  <a:srgbClr val="000000"/>
+                </a:solidFill>
+                <a:latin typeface="Arial" panose="020B0604020202020204" pitchFamily="34" charset="0"/>
+                <a:ea typeface="Calibri"/>
+                <a:cs typeface="Arial" panose="020B0604020202020204" pitchFamily="34" charset="0"/>
+              </a:rPr>
+            </a:br>
+            <a:endParaRPr lang="pl-PL" sz="1600" b="1" dirty="0">
+              <a:solidFill>
+                <a:srgbClr val="000000"/>
+              </a:solidFill>
+              <a:latin typeface="Arial" panose="020B0604020202020204" pitchFamily="34" charset="0"/>
+              <a:ea typeface="Calibri"/>
+              <a:cs typeface="Arial" panose="020B0604020202020204" pitchFamily="34" charset="0"/>
+            </a:endParaRPr>
+          </a:p>
+          <a:p>
+            <a:pPr>
+              <a:buFont typeface="Wingdings" panose="05000000000000000000" pitchFamily="2" charset="2"/>
+              <a:buChar char="Ø"/>
+            </a:pPr>
+            <a:r>
+              <a:rPr lang="pl-PL" sz="1700" b="1" dirty="0">
+                <a:solidFill>
+                  <a:srgbClr val="000000"/>
+                </a:solidFill>
+                <a:latin typeface="Arial" panose="020B0604020202020204" pitchFamily="34" charset="0"/>
+                <a:ea typeface="Calibri"/>
+                <a:cs typeface="Arial" panose="020B0604020202020204" pitchFamily="34" charset="0"/>
+              </a:rPr>
+              <a:t>Zaawansowane struktury:</a:t>
+            </a:r>
+          </a:p>
+          <a:p>
+            <a:pPr lvl="1">
+              <a:buFont typeface="Wingdings" panose="05000000000000000000" pitchFamily="2" charset="2"/>
+              <a:buChar char="Ø"/>
+            </a:pPr>
+            <a:r>
+              <a:rPr lang="pl-PL" sz="1300" b="1" dirty="0" err="1">
+                <a:solidFill>
+                  <a:srgbClr val="000000"/>
+                </a:solidFill>
+                <a:latin typeface="Arial" panose="020B0604020202020204" pitchFamily="34" charset="0"/>
+                <a:ea typeface="Calibri"/>
+                <a:cs typeface="Arial" panose="020B0604020202020204" pitchFamily="34" charset="0"/>
+              </a:rPr>
+              <a:t>HashTable</a:t>
+            </a:r>
+            <a:r>
+              <a:rPr lang="pl-PL" sz="1300" b="1" dirty="0">
+                <a:solidFill>
+                  <a:srgbClr val="000000"/>
+                </a:solidFill>
+                <a:latin typeface="Arial" panose="020B0604020202020204" pitchFamily="34" charset="0"/>
+                <a:ea typeface="Calibri"/>
+                <a:cs typeface="Arial" panose="020B0604020202020204" pitchFamily="34" charset="0"/>
+              </a:rPr>
+              <a:t>:</a:t>
+            </a:r>
+          </a:p>
+          <a:p>
+            <a:pPr lvl="2">
+              <a:buFont typeface="Wingdings" panose="05000000000000000000" pitchFamily="2" charset="2"/>
+              <a:buChar char="Ø"/>
+            </a:pPr>
+            <a:r>
+              <a:rPr lang="pl-PL" sz="1300" b="1" dirty="0" err="1">
+                <a:solidFill>
+                  <a:srgbClr val="000000"/>
+                </a:solidFill>
+                <a:latin typeface="Arial" panose="020B0604020202020204" pitchFamily="34" charset="0"/>
+                <a:ea typeface="Calibri"/>
+                <a:cs typeface="Arial" panose="020B0604020202020204" pitchFamily="34" charset="0"/>
+              </a:rPr>
+              <a:t>HashMap</a:t>
+            </a:r>
+            <a:endParaRPr lang="pl-PL" sz="1300" b="1" dirty="0">
+              <a:solidFill>
+                <a:srgbClr val="000000"/>
+              </a:solidFill>
+              <a:latin typeface="Arial" panose="020B0604020202020204" pitchFamily="34" charset="0"/>
+              <a:ea typeface="Calibri"/>
+              <a:cs typeface="Arial" panose="020B0604020202020204" pitchFamily="34" charset="0"/>
+            </a:endParaRPr>
+          </a:p>
+          <a:p>
+            <a:pPr lvl="2">
+              <a:buFont typeface="Wingdings" panose="05000000000000000000" pitchFamily="2" charset="2"/>
+              <a:buChar char="Ø"/>
+            </a:pPr>
+            <a:r>
+              <a:rPr lang="pl-PL" sz="1300" b="1" dirty="0" err="1">
+                <a:solidFill>
+                  <a:srgbClr val="000000"/>
+                </a:solidFill>
+                <a:latin typeface="Arial" panose="020B0604020202020204" pitchFamily="34" charset="0"/>
+                <a:ea typeface="Calibri"/>
+                <a:cs typeface="Arial" panose="020B0604020202020204" pitchFamily="34" charset="0"/>
+              </a:rPr>
+              <a:t>HashSet</a:t>
+            </a:r>
+            <a:endParaRPr lang="pl-PL" sz="1300" b="1" dirty="0">
+              <a:solidFill>
+                <a:srgbClr val="000000"/>
+              </a:solidFill>
+              <a:latin typeface="Arial" panose="020B0604020202020204" pitchFamily="34" charset="0"/>
+              <a:ea typeface="Calibri"/>
+              <a:cs typeface="Arial" panose="020B0604020202020204" pitchFamily="34" charset="0"/>
+            </a:endParaRPr>
+          </a:p>
+          <a:p>
+            <a:pPr lvl="1">
+              <a:buFont typeface="Wingdings" panose="05000000000000000000" pitchFamily="2" charset="2"/>
+              <a:buChar char="Ø"/>
+            </a:pPr>
+            <a:r>
+              <a:rPr lang="pl-PL" sz="1300" b="1" dirty="0">
+                <a:solidFill>
+                  <a:srgbClr val="000000"/>
+                </a:solidFill>
+                <a:latin typeface="Arial" panose="020B0604020202020204" pitchFamily="34" charset="0"/>
+                <a:ea typeface="Calibri"/>
+                <a:cs typeface="Arial" panose="020B0604020202020204" pitchFamily="34" charset="0"/>
+              </a:rPr>
+              <a:t>Union-</a:t>
+            </a:r>
+            <a:r>
+              <a:rPr lang="pl-PL" sz="1300" b="1" dirty="0" err="1">
+                <a:solidFill>
+                  <a:srgbClr val="000000"/>
+                </a:solidFill>
+                <a:latin typeface="Arial" panose="020B0604020202020204" pitchFamily="34" charset="0"/>
+                <a:ea typeface="Calibri"/>
+                <a:cs typeface="Arial" panose="020B0604020202020204" pitchFamily="34" charset="0"/>
+              </a:rPr>
+              <a:t>Find</a:t>
+            </a:r>
+            <a:r>
+              <a:rPr lang="pl-PL" sz="1300" b="1" dirty="0">
+                <a:solidFill>
+                  <a:srgbClr val="000000"/>
+                </a:solidFill>
+                <a:latin typeface="Arial" panose="020B0604020202020204" pitchFamily="34" charset="0"/>
+                <a:ea typeface="Calibri"/>
+                <a:cs typeface="Arial" panose="020B0604020202020204" pitchFamily="34" charset="0"/>
+              </a:rPr>
+              <a:t> </a:t>
+            </a:r>
+            <a:r>
+              <a:rPr lang="pl-PL" sz="1300" b="1" dirty="0">
+                <a:latin typeface="Arial" panose="020B0604020202020204" pitchFamily="34" charset="0"/>
+                <a:cs typeface="Arial" panose="020B0604020202020204" pitchFamily="34" charset="0"/>
+              </a:rPr>
+              <a:t>(</a:t>
+            </a:r>
+            <a:r>
+              <a:rPr lang="pl-PL" sz="1300" b="1" dirty="0" err="1">
+                <a:latin typeface="Arial" panose="020B0604020202020204" pitchFamily="34" charset="0"/>
+                <a:cs typeface="Arial" panose="020B0604020202020204" pitchFamily="34" charset="0"/>
+              </a:rPr>
+              <a:t>Disjoint</a:t>
+            </a:r>
+            <a:r>
+              <a:rPr lang="pl-PL" sz="1300" b="1" dirty="0">
+                <a:latin typeface="Arial" panose="020B0604020202020204" pitchFamily="34" charset="0"/>
+                <a:cs typeface="Arial" panose="020B0604020202020204" pitchFamily="34" charset="0"/>
+              </a:rPr>
+              <a:t> Set Union, </a:t>
+            </a:r>
+            <a:r>
+              <a:rPr lang="pl-PL" sz="1300" b="1" dirty="0" err="1">
+                <a:latin typeface="Arial" panose="020B0604020202020204" pitchFamily="34" charset="0"/>
+                <a:cs typeface="Arial" panose="020B0604020202020204" pitchFamily="34" charset="0"/>
+              </a:rPr>
+              <a:t>DSU</a:t>
+            </a:r>
+            <a:r>
+              <a:rPr lang="pl-PL" sz="1300" b="1" dirty="0">
+                <a:latin typeface="Arial" panose="020B0604020202020204" pitchFamily="34" charset="0"/>
+                <a:cs typeface="Arial" panose="020B0604020202020204" pitchFamily="34" charset="0"/>
+              </a:rPr>
+              <a:t>)</a:t>
+            </a:r>
+            <a:endParaRPr lang="pl-PL" sz="1300" b="1" dirty="0">
+              <a:solidFill>
+                <a:srgbClr val="000000"/>
+              </a:solidFill>
+              <a:latin typeface="Arial" panose="020B0604020202020204" pitchFamily="34" charset="0"/>
+              <a:ea typeface="Calibri"/>
+              <a:cs typeface="Arial" panose="020B0604020202020204" pitchFamily="34" charset="0"/>
+            </a:endParaRPr>
+          </a:p>
+          <a:p>
+            <a:pPr lvl="1">
+              <a:buFont typeface="Wingdings" panose="05000000000000000000" pitchFamily="2" charset="2"/>
+              <a:buChar char="Ø"/>
+            </a:pPr>
+            <a:r>
+              <a:rPr lang="pl-PL" sz="1300" b="1" dirty="0" err="1">
+                <a:latin typeface="Arial" panose="020B0604020202020204" pitchFamily="34" charset="0"/>
+                <a:cs typeface="Arial" panose="020B0604020202020204" pitchFamily="34" charset="0"/>
+              </a:rPr>
+              <a:t>Trie</a:t>
+            </a:r>
+            <a:r>
+              <a:rPr lang="pl-PL" sz="1300" b="1" dirty="0">
+                <a:latin typeface="Arial" panose="020B0604020202020204" pitchFamily="34" charset="0"/>
+                <a:cs typeface="Arial" panose="020B0604020202020204" pitchFamily="34" charset="0"/>
+              </a:rPr>
+              <a:t> (</a:t>
+            </a:r>
+            <a:r>
+              <a:rPr lang="pl-PL" sz="1300" b="1" dirty="0" err="1">
+                <a:latin typeface="Arial" panose="020B0604020202020204" pitchFamily="34" charset="0"/>
+                <a:cs typeface="Arial" panose="020B0604020202020204" pitchFamily="34" charset="0"/>
+              </a:rPr>
+              <a:t>Prefix</a:t>
+            </a:r>
+            <a:r>
+              <a:rPr lang="pl-PL" sz="1300" b="1" dirty="0">
+                <a:latin typeface="Arial" panose="020B0604020202020204" pitchFamily="34" charset="0"/>
+                <a:cs typeface="Arial" panose="020B0604020202020204" pitchFamily="34" charset="0"/>
+              </a:rPr>
+              <a:t> </a:t>
+            </a:r>
+            <a:r>
+              <a:rPr lang="pl-PL" sz="1300" b="1" dirty="0" err="1">
+                <a:latin typeface="Arial" panose="020B0604020202020204" pitchFamily="34" charset="0"/>
+                <a:cs typeface="Arial" panose="020B0604020202020204" pitchFamily="34" charset="0"/>
+              </a:rPr>
+              <a:t>Tree</a:t>
+            </a:r>
+            <a:r>
+              <a:rPr lang="pl-PL" sz="1300" b="1" dirty="0">
+                <a:latin typeface="Arial" panose="020B0604020202020204" pitchFamily="34" charset="0"/>
+                <a:cs typeface="Arial" panose="020B0604020202020204" pitchFamily="34" charset="0"/>
+              </a:rPr>
+              <a:t>)</a:t>
+            </a:r>
+            <a:endParaRPr lang="pl-PL" sz="1300" b="1" dirty="0">
+              <a:solidFill>
+                <a:srgbClr val="000000"/>
+              </a:solidFill>
+              <a:latin typeface="Arial" panose="020B0604020202020204" pitchFamily="34" charset="0"/>
+              <a:ea typeface="Calibri"/>
+              <a:cs typeface="Arial" panose="020B0604020202020204" pitchFamily="34" charset="0"/>
+            </a:endParaRPr>
+          </a:p>
+          <a:p>
+            <a:pPr lvl="1">
+              <a:buFont typeface="Wingdings" panose="05000000000000000000" pitchFamily="2" charset="2"/>
+              <a:buChar char="Ø"/>
+            </a:pPr>
+            <a:r>
+              <a:rPr lang="pl-PL" sz="1300" b="1" dirty="0">
+                <a:solidFill>
+                  <a:srgbClr val="000000"/>
+                </a:solidFill>
+                <a:latin typeface="Arial" panose="020B0604020202020204" pitchFamily="34" charset="0"/>
+                <a:ea typeface="Calibri"/>
+                <a:cs typeface="Arial" panose="020B0604020202020204" pitchFamily="34" charset="0"/>
+              </a:rPr>
+              <a:t>Kopiec binarny (</a:t>
+            </a:r>
+            <a:r>
+              <a:rPr lang="pl-PL" sz="1300" b="1" dirty="0" err="1">
+                <a:solidFill>
+                  <a:srgbClr val="000000"/>
+                </a:solidFill>
+                <a:latin typeface="Arial" panose="020B0604020202020204" pitchFamily="34" charset="0"/>
+                <a:ea typeface="Calibri"/>
+                <a:cs typeface="Arial" panose="020B0604020202020204" pitchFamily="34" charset="0"/>
+              </a:rPr>
+              <a:t>Binary</a:t>
+            </a:r>
+            <a:r>
+              <a:rPr lang="pl-PL" sz="1300" b="1" dirty="0">
+                <a:solidFill>
+                  <a:srgbClr val="000000"/>
+                </a:solidFill>
+                <a:latin typeface="Arial" panose="020B0604020202020204" pitchFamily="34" charset="0"/>
+                <a:ea typeface="Calibri"/>
+                <a:cs typeface="Arial" panose="020B0604020202020204" pitchFamily="34" charset="0"/>
+              </a:rPr>
+              <a:t> </a:t>
+            </a:r>
+            <a:r>
+              <a:rPr lang="pl-PL" sz="1300" b="1" dirty="0" err="1">
+                <a:solidFill>
+                  <a:srgbClr val="000000"/>
+                </a:solidFill>
+                <a:latin typeface="Arial" panose="020B0604020202020204" pitchFamily="34" charset="0"/>
+                <a:ea typeface="Calibri"/>
+                <a:cs typeface="Arial" panose="020B0604020202020204" pitchFamily="34" charset="0"/>
+              </a:rPr>
+              <a:t>Heap</a:t>
+            </a:r>
+            <a:r>
+              <a:rPr lang="pl-PL" sz="1300" b="1" dirty="0">
+                <a:solidFill>
+                  <a:srgbClr val="000000"/>
+                </a:solidFill>
+                <a:latin typeface="Arial" panose="020B0604020202020204" pitchFamily="34" charset="0"/>
+                <a:ea typeface="Calibri"/>
+                <a:cs typeface="Arial" panose="020B0604020202020204" pitchFamily="34" charset="0"/>
+              </a:rPr>
+              <a:t>)</a:t>
+            </a:r>
+          </a:p>
+          <a:p>
+            <a:pPr lvl="1">
+              <a:buFont typeface="Wingdings" panose="05000000000000000000" pitchFamily="2" charset="2"/>
+              <a:buChar char="Ø"/>
+            </a:pPr>
+            <a:r>
+              <a:rPr lang="pl-PL" sz="1300" b="1" dirty="0">
+                <a:solidFill>
+                  <a:srgbClr val="000000"/>
+                </a:solidFill>
+                <a:latin typeface="Arial" panose="020B0604020202020204" pitchFamily="34" charset="0"/>
+                <a:ea typeface="Calibri"/>
+                <a:cs typeface="Arial" panose="020B0604020202020204" pitchFamily="34" charset="0"/>
+              </a:rPr>
+              <a:t>Drzewa czerwono-czarne (Red-Black </a:t>
+            </a:r>
+            <a:r>
+              <a:rPr lang="pl-PL" sz="1300" b="1" dirty="0" err="1">
+                <a:solidFill>
+                  <a:srgbClr val="000000"/>
+                </a:solidFill>
+                <a:latin typeface="Arial" panose="020B0604020202020204" pitchFamily="34" charset="0"/>
+                <a:ea typeface="Calibri"/>
+                <a:cs typeface="Arial" panose="020B0604020202020204" pitchFamily="34" charset="0"/>
+              </a:rPr>
+              <a:t>Trees</a:t>
+            </a:r>
+            <a:r>
+              <a:rPr lang="pl-PL" sz="1300" b="1" dirty="0">
+                <a:solidFill>
+                  <a:srgbClr val="000000"/>
+                </a:solidFill>
+                <a:latin typeface="Arial" panose="020B0604020202020204" pitchFamily="34" charset="0"/>
+                <a:ea typeface="Calibri"/>
+                <a:cs typeface="Arial" panose="020B0604020202020204" pitchFamily="34" charset="0"/>
+              </a:rPr>
+              <a:t>)</a:t>
+            </a:r>
+          </a:p>
+          <a:p>
+            <a:pPr>
+              <a:buFont typeface="Wingdings" panose="05000000000000000000" pitchFamily="2" charset="2"/>
+              <a:buChar char="Ø"/>
+            </a:pPr>
+            <a:r>
+              <a:rPr lang="pl-PL" sz="1700" b="1" dirty="0">
+                <a:latin typeface="Arial" panose="020B0604020202020204" pitchFamily="34" charset="0"/>
+                <a:cs typeface="Arial" panose="020B0604020202020204" pitchFamily="34" charset="0"/>
+              </a:rPr>
+              <a:t>Reprezentacja drzew i grafów w </a:t>
+            </a:r>
+            <a:r>
+              <a:rPr lang="pl-PL" sz="1700" b="1" dirty="0" err="1">
+                <a:latin typeface="Arial" panose="020B0604020202020204" pitchFamily="34" charset="0"/>
+                <a:cs typeface="Arial" panose="020B0604020202020204" pitchFamily="34" charset="0"/>
+              </a:rPr>
+              <a:t>Pythonie</a:t>
+            </a:r>
+            <a:endParaRPr lang="pl-PL" sz="1700" b="1" dirty="0">
+              <a:latin typeface="Arial" panose="020B0604020202020204" pitchFamily="34" charset="0"/>
+              <a:cs typeface="Arial" panose="020B0604020202020204" pitchFamily="34" charset="0"/>
+            </a:endParaRPr>
+          </a:p>
+          <a:p>
+            <a:pPr>
+              <a:buFont typeface="Wingdings" panose="05000000000000000000" pitchFamily="2" charset="2"/>
+              <a:buChar char="Ø"/>
+            </a:pPr>
+            <a:r>
+              <a:rPr lang="pl-PL" sz="1700" b="1" dirty="0">
+                <a:latin typeface="Arial" panose="020B0604020202020204" pitchFamily="34" charset="0"/>
+                <a:cs typeface="Arial" panose="020B0604020202020204" pitchFamily="34" charset="0"/>
+              </a:rPr>
+              <a:t>Przeszukiwanie grafu: </a:t>
+            </a:r>
+            <a:r>
+              <a:rPr lang="pl-PL" sz="1700" b="1" dirty="0" err="1">
+                <a:latin typeface="Arial" panose="020B0604020202020204" pitchFamily="34" charset="0"/>
+                <a:cs typeface="Arial" panose="020B0604020202020204" pitchFamily="34" charset="0"/>
+              </a:rPr>
+              <a:t>BFS</a:t>
+            </a:r>
+            <a:r>
+              <a:rPr lang="pl-PL" sz="1700" b="1" dirty="0">
+                <a:latin typeface="Arial" panose="020B0604020202020204" pitchFamily="34" charset="0"/>
+                <a:cs typeface="Arial" panose="020B0604020202020204" pitchFamily="34" charset="0"/>
+              </a:rPr>
+              <a:t> i </a:t>
+            </a:r>
+            <a:r>
+              <a:rPr lang="pl-PL" sz="1700" b="1" dirty="0" err="1">
+                <a:latin typeface="Arial" panose="020B0604020202020204" pitchFamily="34" charset="0"/>
+                <a:cs typeface="Arial" panose="020B0604020202020204" pitchFamily="34" charset="0"/>
+              </a:rPr>
+              <a:t>DFS</a:t>
+            </a:r>
+            <a:endParaRPr lang="pl-PL" sz="1700" b="1" dirty="0">
+              <a:latin typeface="Arial" panose="020B0604020202020204" pitchFamily="34" charset="0"/>
+              <a:cs typeface="Arial" panose="020B0604020202020204" pitchFamily="34" charset="0"/>
+            </a:endParaRPr>
+          </a:p>
+          <a:p>
+            <a:pPr>
+              <a:buFont typeface="Wingdings" panose="05000000000000000000" pitchFamily="2" charset="2"/>
+              <a:buChar char="Ø"/>
+            </a:pPr>
+            <a:r>
+              <a:rPr lang="pl-PL" sz="1700" b="1" dirty="0">
+                <a:latin typeface="Arial" panose="020B0604020202020204" pitchFamily="34" charset="0"/>
+                <a:cs typeface="Arial" panose="020B0604020202020204" pitchFamily="34" charset="0"/>
+              </a:rPr>
+              <a:t>Podsumowanie</a:t>
+            </a:r>
+          </a:p>
+          <a:p>
+            <a:pPr>
+              <a:buFont typeface="Wingdings" panose="05000000000000000000" pitchFamily="2" charset="2"/>
+              <a:buChar char="Ø"/>
+            </a:pPr>
+            <a:r>
+              <a:rPr lang="pl-PL" sz="1700" b="1" dirty="0">
+                <a:latin typeface="Arial" panose="020B0604020202020204" pitchFamily="34" charset="0"/>
+                <a:cs typeface="Arial" panose="020B0604020202020204" pitchFamily="34" charset="0"/>
+              </a:rPr>
+              <a:t>Quiz i część praktyczna</a:t>
+            </a:r>
+          </a:p>
+          <a:p>
+            <a:pPr>
+              <a:buFont typeface="Wingdings" panose="05000000000000000000" pitchFamily="2" charset="2"/>
+              <a:buChar char="Ø"/>
+            </a:pPr>
+            <a:endParaRPr lang="pl-PL" sz="2000" dirty="0">
+              <a:solidFill>
+                <a:srgbClr val="000000"/>
+              </a:solidFill>
+              <a:latin typeface="Arial" panose="020B0604020202020204" pitchFamily="34" charset="0"/>
+              <a:ea typeface="Calibri"/>
+              <a:cs typeface="Arial" panose="020B0604020202020204" pitchFamily="34" charset="0"/>
+            </a:endParaRPr>
+          </a:p>
+          <a:p>
+            <a:pPr lvl="1">
+              <a:buFont typeface="Wingdings" panose="05000000000000000000" pitchFamily="2" charset="2"/>
+              <a:buChar char="Ø"/>
+            </a:pPr>
+            <a:endParaRPr lang="en-US" sz="1600" b="1" dirty="0">
+              <a:solidFill>
+                <a:srgbClr val="000000"/>
+              </a:solidFill>
+              <a:latin typeface="Arial" panose="020B0604020202020204" pitchFamily="34" charset="0"/>
+              <a:ea typeface="Calibri"/>
+              <a:cs typeface="Arial" panose="020B0604020202020204" pitchFamily="34" charset="0"/>
+            </a:endParaRPr>
+          </a:p>
+        </p:txBody>
+      </p:sp>
+    </p:spTree>
+    <p:extLst>
+      <p:ext uri="{BB962C8B-B14F-4D97-AF65-F5344CB8AC3E}">
+        <p14:creationId xmlns:p14="http://schemas.microsoft.com/office/powerpoint/2010/main" val="3711920479"/>
+      </p:ext>
+    </p:extLst>
+  </p:cSld>
+  <p:clrMapOvr>
+    <a:masterClrMapping/>
+  </p:clrMapOvr>
+</p:sld>
+</file>
+
+<file path=ppt/slides/slide20.xml><?xml version="1.0" encoding="utf-8"?>
 <p:sld xmlns:a="http://schemas.openxmlformats.org/drawingml/2006/main" xmlns:r="http://schemas.openxmlformats.org/officeDocument/2006/relationships" xmlns:p="http://schemas.openxmlformats.org/presentationml/2006/main">
   <p:cSld>
     <p:spTree>
@@ -7912,774 +8918,7 @@
 </p:sld>
 </file>
 
-<file path=ppt/slides/slide2.xml><?xml version="1.0" encoding="utf-8"?>
-<p:sld xmlns:a="http://schemas.openxmlformats.org/drawingml/2006/main" xmlns:r="http://schemas.openxmlformats.org/officeDocument/2006/relationships" xmlns:p="http://schemas.openxmlformats.org/presentationml/2006/main">
-  <p:cSld>
-    <p:spTree>
-      <p:nvGrpSpPr>
-        <p:cNvPr id="1" name=""/>
-        <p:cNvGrpSpPr/>
-        <p:nvPr/>
-      </p:nvGrpSpPr>
-      <p:grpSpPr>
-        <a:xfrm>
-          <a:off x="0" y="0"/>
-          <a:ext cx="0" cy="0"/>
-          <a:chOff x="0" y="0"/>
-          <a:chExt cx="0" cy="0"/>
-        </a:xfrm>
-      </p:grpSpPr>
-      <p:sp>
-        <p:nvSpPr>
-          <p:cNvPr id="2" name="Title 1">
-            <a:extLst>
-              <a:ext uri="{FF2B5EF4-FFF2-40B4-BE49-F238E27FC236}">
-                <a16:creationId xmlns:a16="http://schemas.microsoft.com/office/drawing/2014/main" id="{121ED55C-3F86-B39B-CA5C-D0F09AC6DC4B}"/>
-              </a:ext>
-            </a:extLst>
-          </p:cNvPr>
-          <p:cNvSpPr>
-            <a:spLocks noGrp="1"/>
-          </p:cNvSpPr>
-          <p:nvPr>
-            <p:ph type="title"/>
-          </p:nvPr>
-        </p:nvSpPr>
-        <p:spPr/>
-        <p:txBody>
-          <a:bodyPr/>
-          <a:lstStyle/>
-          <a:p>
-            <a:pPr algn="ctr"/>
-            <a:r>
-              <a:rPr lang="en-US" b="1" dirty="0">
-                <a:latin typeface="Arial" panose="020B0604020202020204" pitchFamily="34" charset="0"/>
-                <a:cs typeface="Arial" panose="020B0604020202020204" pitchFamily="34" charset="0"/>
-              </a:rPr>
-              <a:t>Plan </a:t>
-            </a:r>
-            <a:r>
-              <a:rPr lang="en-US" b="1" dirty="0" err="1">
-                <a:latin typeface="Arial" panose="020B0604020202020204" pitchFamily="34" charset="0"/>
-                <a:cs typeface="Arial" panose="020B0604020202020204" pitchFamily="34" charset="0"/>
-              </a:rPr>
-              <a:t>prezentacji</a:t>
-            </a:r>
-            <a:r>
-              <a:rPr lang="en-US" b="1" dirty="0">
-                <a:latin typeface="Arial" panose="020B0604020202020204" pitchFamily="34" charset="0"/>
-                <a:cs typeface="Arial" panose="020B0604020202020204" pitchFamily="34" charset="0"/>
-              </a:rPr>
-              <a:t> </a:t>
-            </a:r>
-          </a:p>
-        </p:txBody>
-      </p:sp>
-      <p:sp>
-        <p:nvSpPr>
-          <p:cNvPr id="3" name="Content Placeholder 2">
-            <a:extLst>
-              <a:ext uri="{FF2B5EF4-FFF2-40B4-BE49-F238E27FC236}">
-                <a16:creationId xmlns:a16="http://schemas.microsoft.com/office/drawing/2014/main" id="{5D40D6B6-F404-BC45-4840-866A1A801607}"/>
-              </a:ext>
-            </a:extLst>
-          </p:cNvPr>
-          <p:cNvSpPr>
-            <a:spLocks noGrp="1"/>
-          </p:cNvSpPr>
-          <p:nvPr>
-            <p:ph idx="1"/>
-          </p:nvPr>
-        </p:nvSpPr>
-        <p:spPr/>
-        <p:txBody>
-          <a:bodyPr vert="horz" lIns="91440" tIns="45720" rIns="91440" bIns="45720" rtlCol="0" anchor="t">
-            <a:normAutofit fontScale="92500" lnSpcReduction="10000"/>
-          </a:bodyPr>
-          <a:lstStyle/>
-          <a:p>
-            <a:pPr>
-              <a:buFont typeface="Wingdings" panose="05000000000000000000" pitchFamily="2" charset="2"/>
-              <a:buChar char="Ø"/>
-            </a:pPr>
-            <a:r>
-              <a:rPr lang="pl-PL" sz="1700" b="1" dirty="0">
-                <a:solidFill>
-                  <a:srgbClr val="000000"/>
-                </a:solidFill>
-                <a:latin typeface="Arial" panose="020B0604020202020204" pitchFamily="34" charset="0"/>
-                <a:ea typeface="Calibri"/>
-                <a:cs typeface="Arial" panose="020B0604020202020204" pitchFamily="34" charset="0"/>
-              </a:rPr>
-              <a:t> Podstawowe struktury:</a:t>
-            </a:r>
-          </a:p>
-          <a:p>
-            <a:pPr lvl="1">
-              <a:buFont typeface="Wingdings" panose="05000000000000000000" pitchFamily="2" charset="2"/>
-              <a:buChar char="Ø"/>
-            </a:pPr>
-            <a:r>
-              <a:rPr lang="pl-PL" sz="1300" b="1" dirty="0">
-                <a:solidFill>
-                  <a:srgbClr val="000000"/>
-                </a:solidFill>
-                <a:latin typeface="Arial" panose="020B0604020202020204" pitchFamily="34" charset="0"/>
-                <a:ea typeface="Calibri"/>
-                <a:cs typeface="Arial" panose="020B0604020202020204" pitchFamily="34" charset="0"/>
-              </a:rPr>
-              <a:t>Stos (</a:t>
-            </a:r>
-            <a:r>
-              <a:rPr lang="pl-PL" sz="1300" b="1" dirty="0" err="1">
-                <a:solidFill>
-                  <a:srgbClr val="000000"/>
-                </a:solidFill>
-                <a:latin typeface="Arial" panose="020B0604020202020204" pitchFamily="34" charset="0"/>
-                <a:ea typeface="Calibri"/>
-                <a:cs typeface="Arial" panose="020B0604020202020204" pitchFamily="34" charset="0"/>
-              </a:rPr>
-              <a:t>Stack</a:t>
-            </a:r>
-            <a:r>
-              <a:rPr lang="pl-PL" sz="1300" b="1" dirty="0">
-                <a:solidFill>
-                  <a:srgbClr val="000000"/>
-                </a:solidFill>
-                <a:latin typeface="Arial" panose="020B0604020202020204" pitchFamily="34" charset="0"/>
-                <a:ea typeface="Calibri"/>
-                <a:cs typeface="Arial" panose="020B0604020202020204" pitchFamily="34" charset="0"/>
-              </a:rPr>
-              <a:t>) i kolejka (Queue)</a:t>
-            </a:r>
-          </a:p>
-          <a:p>
-            <a:pPr lvl="1">
-              <a:buFont typeface="Wingdings" panose="05000000000000000000" pitchFamily="2" charset="2"/>
-              <a:buChar char="Ø"/>
-            </a:pPr>
-            <a:r>
-              <a:rPr lang="pl-PL" sz="1300" b="1" dirty="0">
-                <a:solidFill>
-                  <a:srgbClr val="000000"/>
-                </a:solidFill>
-                <a:latin typeface="Arial" panose="020B0604020202020204" pitchFamily="34" charset="0"/>
-                <a:ea typeface="Calibri"/>
-                <a:cs typeface="Arial" panose="020B0604020202020204" pitchFamily="34" charset="0"/>
-              </a:rPr>
-              <a:t>Lista jednokierunkowa (</a:t>
-            </a:r>
-            <a:r>
-              <a:rPr lang="pl-PL" sz="1300" b="1" dirty="0" err="1">
-                <a:solidFill>
-                  <a:srgbClr val="000000"/>
-                </a:solidFill>
-                <a:latin typeface="Arial" panose="020B0604020202020204" pitchFamily="34" charset="0"/>
-                <a:ea typeface="Calibri"/>
-                <a:cs typeface="Arial" panose="020B0604020202020204" pitchFamily="34" charset="0"/>
-              </a:rPr>
-              <a:t>Linked</a:t>
-            </a:r>
-            <a:r>
-              <a:rPr lang="pl-PL" sz="1300" b="1" dirty="0">
-                <a:solidFill>
-                  <a:srgbClr val="000000"/>
-                </a:solidFill>
-                <a:latin typeface="Arial" panose="020B0604020202020204" pitchFamily="34" charset="0"/>
-                <a:ea typeface="Calibri"/>
-                <a:cs typeface="Arial" panose="020B0604020202020204" pitchFamily="34" charset="0"/>
-              </a:rPr>
-              <a:t> List)</a:t>
-            </a:r>
-          </a:p>
-          <a:p>
-            <a:pPr lvl="1">
-              <a:buFont typeface="Wingdings" panose="05000000000000000000" pitchFamily="2" charset="2"/>
-              <a:buChar char="Ø"/>
-            </a:pPr>
-            <a:r>
-              <a:rPr lang="pl-PL" sz="1300" b="1" dirty="0">
-                <a:solidFill>
-                  <a:srgbClr val="000000"/>
-                </a:solidFill>
-                <a:latin typeface="Arial" panose="020B0604020202020204" pitchFamily="34" charset="0"/>
-                <a:ea typeface="Calibri"/>
-                <a:cs typeface="Arial" panose="020B0604020202020204" pitchFamily="34" charset="0"/>
-              </a:rPr>
-              <a:t>Drzewo poszukiwań binarnych (</a:t>
-            </a:r>
-            <a:r>
-              <a:rPr lang="pl-PL" sz="1300" b="1" dirty="0" err="1">
-                <a:solidFill>
-                  <a:srgbClr val="000000"/>
-                </a:solidFill>
-                <a:latin typeface="Arial" panose="020B0604020202020204" pitchFamily="34" charset="0"/>
-                <a:ea typeface="Calibri"/>
-                <a:cs typeface="Arial" panose="020B0604020202020204" pitchFamily="34" charset="0"/>
-              </a:rPr>
-              <a:t>Binary</a:t>
-            </a:r>
-            <a:r>
-              <a:rPr lang="pl-PL" sz="1300" b="1" dirty="0">
-                <a:solidFill>
-                  <a:srgbClr val="000000"/>
-                </a:solidFill>
-                <a:latin typeface="Arial" panose="020B0604020202020204" pitchFamily="34" charset="0"/>
-                <a:ea typeface="Calibri"/>
-                <a:cs typeface="Arial" panose="020B0604020202020204" pitchFamily="34" charset="0"/>
-              </a:rPr>
-              <a:t> </a:t>
-            </a:r>
-            <a:r>
-              <a:rPr lang="pl-PL" sz="1300" b="1" dirty="0" err="1">
-                <a:solidFill>
-                  <a:srgbClr val="000000"/>
-                </a:solidFill>
-                <a:latin typeface="Arial" panose="020B0604020202020204" pitchFamily="34" charset="0"/>
-                <a:ea typeface="Calibri"/>
-                <a:cs typeface="Arial" panose="020B0604020202020204" pitchFamily="34" charset="0"/>
-              </a:rPr>
-              <a:t>Search</a:t>
-            </a:r>
-            <a:r>
-              <a:rPr lang="pl-PL" sz="1300" b="1" dirty="0">
-                <a:solidFill>
-                  <a:srgbClr val="000000"/>
-                </a:solidFill>
-                <a:latin typeface="Arial" panose="020B0604020202020204" pitchFamily="34" charset="0"/>
-                <a:ea typeface="Calibri"/>
-                <a:cs typeface="Arial" panose="020B0604020202020204" pitchFamily="34" charset="0"/>
-              </a:rPr>
-              <a:t> </a:t>
-            </a:r>
-            <a:r>
-              <a:rPr lang="pl-PL" sz="1300" b="1" dirty="0" err="1">
-                <a:solidFill>
-                  <a:srgbClr val="000000"/>
-                </a:solidFill>
-                <a:latin typeface="Arial" panose="020B0604020202020204" pitchFamily="34" charset="0"/>
-                <a:ea typeface="Calibri"/>
-                <a:cs typeface="Arial" panose="020B0604020202020204" pitchFamily="34" charset="0"/>
-              </a:rPr>
-              <a:t>Tree</a:t>
-            </a:r>
-            <a:r>
-              <a:rPr lang="pl-PL" sz="1300" b="1" dirty="0">
-                <a:solidFill>
-                  <a:srgbClr val="000000"/>
-                </a:solidFill>
-                <a:latin typeface="Arial" panose="020B0604020202020204" pitchFamily="34" charset="0"/>
-                <a:ea typeface="Calibri"/>
-                <a:cs typeface="Arial" panose="020B0604020202020204" pitchFamily="34" charset="0"/>
-              </a:rPr>
-              <a:t> – </a:t>
-            </a:r>
-            <a:r>
-              <a:rPr lang="pl-PL" sz="1300" b="1" dirty="0" err="1">
-                <a:solidFill>
-                  <a:srgbClr val="000000"/>
-                </a:solidFill>
-                <a:latin typeface="Arial" panose="020B0604020202020204" pitchFamily="34" charset="0"/>
-                <a:ea typeface="Calibri"/>
-                <a:cs typeface="Arial" panose="020B0604020202020204" pitchFamily="34" charset="0"/>
-              </a:rPr>
-              <a:t>BST</a:t>
-            </a:r>
-            <a:r>
-              <a:rPr lang="pl-PL" sz="1300" b="1" dirty="0">
-                <a:solidFill>
-                  <a:srgbClr val="000000"/>
-                </a:solidFill>
-                <a:latin typeface="Arial" panose="020B0604020202020204" pitchFamily="34" charset="0"/>
-                <a:ea typeface="Calibri"/>
-                <a:cs typeface="Arial" panose="020B0604020202020204" pitchFamily="34" charset="0"/>
-              </a:rPr>
-              <a:t>)</a:t>
-            </a:r>
-            <a:br>
-              <a:rPr lang="pl-PL" sz="1600" b="1" dirty="0">
-                <a:solidFill>
-                  <a:srgbClr val="000000"/>
-                </a:solidFill>
-                <a:latin typeface="Arial" panose="020B0604020202020204" pitchFamily="34" charset="0"/>
-                <a:ea typeface="Calibri"/>
-                <a:cs typeface="Arial" panose="020B0604020202020204" pitchFamily="34" charset="0"/>
-              </a:rPr>
-            </a:br>
-            <a:endParaRPr lang="pl-PL" sz="1600" b="1" dirty="0">
-              <a:solidFill>
-                <a:srgbClr val="000000"/>
-              </a:solidFill>
-              <a:latin typeface="Arial" panose="020B0604020202020204" pitchFamily="34" charset="0"/>
-              <a:ea typeface="Calibri"/>
-              <a:cs typeface="Arial" panose="020B0604020202020204" pitchFamily="34" charset="0"/>
-            </a:endParaRPr>
-          </a:p>
-          <a:p>
-            <a:pPr>
-              <a:buFont typeface="Wingdings" panose="05000000000000000000" pitchFamily="2" charset="2"/>
-              <a:buChar char="Ø"/>
-            </a:pPr>
-            <a:r>
-              <a:rPr lang="pl-PL" sz="1700" b="1" dirty="0">
-                <a:solidFill>
-                  <a:srgbClr val="000000"/>
-                </a:solidFill>
-                <a:latin typeface="Arial" panose="020B0604020202020204" pitchFamily="34" charset="0"/>
-                <a:ea typeface="Calibri"/>
-                <a:cs typeface="Arial" panose="020B0604020202020204" pitchFamily="34" charset="0"/>
-              </a:rPr>
-              <a:t>Zaawansowane struktury:</a:t>
-            </a:r>
-          </a:p>
-          <a:p>
-            <a:pPr lvl="1">
-              <a:buFont typeface="Wingdings" panose="05000000000000000000" pitchFamily="2" charset="2"/>
-              <a:buChar char="Ø"/>
-            </a:pPr>
-            <a:r>
-              <a:rPr lang="pl-PL" sz="1300" b="1" dirty="0" err="1">
-                <a:solidFill>
-                  <a:srgbClr val="000000"/>
-                </a:solidFill>
-                <a:latin typeface="Arial" panose="020B0604020202020204" pitchFamily="34" charset="0"/>
-                <a:ea typeface="Calibri"/>
-                <a:cs typeface="Arial" panose="020B0604020202020204" pitchFamily="34" charset="0"/>
-              </a:rPr>
-              <a:t>HashTable</a:t>
-            </a:r>
-            <a:r>
-              <a:rPr lang="pl-PL" sz="1300" b="1" dirty="0">
-                <a:solidFill>
-                  <a:srgbClr val="000000"/>
-                </a:solidFill>
-                <a:latin typeface="Arial" panose="020B0604020202020204" pitchFamily="34" charset="0"/>
-                <a:ea typeface="Calibri"/>
-                <a:cs typeface="Arial" panose="020B0604020202020204" pitchFamily="34" charset="0"/>
-              </a:rPr>
-              <a:t>:</a:t>
-            </a:r>
-          </a:p>
-          <a:p>
-            <a:pPr lvl="2">
-              <a:buFont typeface="Wingdings" panose="05000000000000000000" pitchFamily="2" charset="2"/>
-              <a:buChar char="Ø"/>
-            </a:pPr>
-            <a:r>
-              <a:rPr lang="pl-PL" sz="1300" b="1" dirty="0" err="1">
-                <a:solidFill>
-                  <a:srgbClr val="000000"/>
-                </a:solidFill>
-                <a:latin typeface="Arial" panose="020B0604020202020204" pitchFamily="34" charset="0"/>
-                <a:ea typeface="Calibri"/>
-                <a:cs typeface="Arial" panose="020B0604020202020204" pitchFamily="34" charset="0"/>
-              </a:rPr>
-              <a:t>HashMap</a:t>
-            </a:r>
-            <a:endParaRPr lang="pl-PL" sz="1300" b="1" dirty="0">
-              <a:solidFill>
-                <a:srgbClr val="000000"/>
-              </a:solidFill>
-              <a:latin typeface="Arial" panose="020B0604020202020204" pitchFamily="34" charset="0"/>
-              <a:ea typeface="Calibri"/>
-              <a:cs typeface="Arial" panose="020B0604020202020204" pitchFamily="34" charset="0"/>
-            </a:endParaRPr>
-          </a:p>
-          <a:p>
-            <a:pPr lvl="2">
-              <a:buFont typeface="Wingdings" panose="05000000000000000000" pitchFamily="2" charset="2"/>
-              <a:buChar char="Ø"/>
-            </a:pPr>
-            <a:r>
-              <a:rPr lang="pl-PL" sz="1300" b="1" dirty="0" err="1">
-                <a:solidFill>
-                  <a:srgbClr val="000000"/>
-                </a:solidFill>
-                <a:latin typeface="Arial" panose="020B0604020202020204" pitchFamily="34" charset="0"/>
-                <a:ea typeface="Calibri"/>
-                <a:cs typeface="Arial" panose="020B0604020202020204" pitchFamily="34" charset="0"/>
-              </a:rPr>
-              <a:t>HashSet</a:t>
-            </a:r>
-            <a:endParaRPr lang="pl-PL" sz="1300" b="1" dirty="0">
-              <a:solidFill>
-                <a:srgbClr val="000000"/>
-              </a:solidFill>
-              <a:latin typeface="Arial" panose="020B0604020202020204" pitchFamily="34" charset="0"/>
-              <a:ea typeface="Calibri"/>
-              <a:cs typeface="Arial" panose="020B0604020202020204" pitchFamily="34" charset="0"/>
-            </a:endParaRPr>
-          </a:p>
-          <a:p>
-            <a:pPr lvl="1">
-              <a:buFont typeface="Wingdings" panose="05000000000000000000" pitchFamily="2" charset="2"/>
-              <a:buChar char="Ø"/>
-            </a:pPr>
-            <a:r>
-              <a:rPr lang="pl-PL" sz="1300" b="1" dirty="0">
-                <a:solidFill>
-                  <a:srgbClr val="000000"/>
-                </a:solidFill>
-                <a:latin typeface="Arial" panose="020B0604020202020204" pitchFamily="34" charset="0"/>
-                <a:ea typeface="Calibri"/>
-                <a:cs typeface="Arial" panose="020B0604020202020204" pitchFamily="34" charset="0"/>
-              </a:rPr>
-              <a:t>Union-</a:t>
-            </a:r>
-            <a:r>
-              <a:rPr lang="pl-PL" sz="1300" b="1" dirty="0" err="1">
-                <a:solidFill>
-                  <a:srgbClr val="000000"/>
-                </a:solidFill>
-                <a:latin typeface="Arial" panose="020B0604020202020204" pitchFamily="34" charset="0"/>
-                <a:ea typeface="Calibri"/>
-                <a:cs typeface="Arial" panose="020B0604020202020204" pitchFamily="34" charset="0"/>
-              </a:rPr>
-              <a:t>Find</a:t>
-            </a:r>
-            <a:r>
-              <a:rPr lang="pl-PL" sz="1300" b="1" dirty="0">
-                <a:solidFill>
-                  <a:srgbClr val="000000"/>
-                </a:solidFill>
-                <a:latin typeface="Arial" panose="020B0604020202020204" pitchFamily="34" charset="0"/>
-                <a:ea typeface="Calibri"/>
-                <a:cs typeface="Arial" panose="020B0604020202020204" pitchFamily="34" charset="0"/>
-              </a:rPr>
-              <a:t> </a:t>
-            </a:r>
-            <a:r>
-              <a:rPr lang="pl-PL" sz="1300" b="1" dirty="0">
-                <a:latin typeface="Arial" panose="020B0604020202020204" pitchFamily="34" charset="0"/>
-                <a:cs typeface="Arial" panose="020B0604020202020204" pitchFamily="34" charset="0"/>
-              </a:rPr>
-              <a:t>(</a:t>
-            </a:r>
-            <a:r>
-              <a:rPr lang="pl-PL" sz="1300" b="1" dirty="0" err="1">
-                <a:latin typeface="Arial" panose="020B0604020202020204" pitchFamily="34" charset="0"/>
-                <a:cs typeface="Arial" panose="020B0604020202020204" pitchFamily="34" charset="0"/>
-              </a:rPr>
-              <a:t>Disjoint</a:t>
-            </a:r>
-            <a:r>
-              <a:rPr lang="pl-PL" sz="1300" b="1" dirty="0">
-                <a:latin typeface="Arial" panose="020B0604020202020204" pitchFamily="34" charset="0"/>
-                <a:cs typeface="Arial" panose="020B0604020202020204" pitchFamily="34" charset="0"/>
-              </a:rPr>
-              <a:t> Set Union, </a:t>
-            </a:r>
-            <a:r>
-              <a:rPr lang="pl-PL" sz="1300" b="1" dirty="0" err="1">
-                <a:latin typeface="Arial" panose="020B0604020202020204" pitchFamily="34" charset="0"/>
-                <a:cs typeface="Arial" panose="020B0604020202020204" pitchFamily="34" charset="0"/>
-              </a:rPr>
-              <a:t>DSU</a:t>
-            </a:r>
-            <a:r>
-              <a:rPr lang="pl-PL" sz="1300" b="1" dirty="0">
-                <a:latin typeface="Arial" panose="020B0604020202020204" pitchFamily="34" charset="0"/>
-                <a:cs typeface="Arial" panose="020B0604020202020204" pitchFamily="34" charset="0"/>
-              </a:rPr>
-              <a:t>)</a:t>
-            </a:r>
-            <a:endParaRPr lang="pl-PL" sz="1300" b="1" dirty="0">
-              <a:solidFill>
-                <a:srgbClr val="000000"/>
-              </a:solidFill>
-              <a:latin typeface="Arial" panose="020B0604020202020204" pitchFamily="34" charset="0"/>
-              <a:ea typeface="Calibri"/>
-              <a:cs typeface="Arial" panose="020B0604020202020204" pitchFamily="34" charset="0"/>
-            </a:endParaRPr>
-          </a:p>
-          <a:p>
-            <a:pPr lvl="1">
-              <a:buFont typeface="Wingdings" panose="05000000000000000000" pitchFamily="2" charset="2"/>
-              <a:buChar char="Ø"/>
-            </a:pPr>
-            <a:r>
-              <a:rPr lang="pl-PL" sz="1300" b="1" dirty="0" err="1">
-                <a:latin typeface="Arial" panose="020B0604020202020204" pitchFamily="34" charset="0"/>
-                <a:cs typeface="Arial" panose="020B0604020202020204" pitchFamily="34" charset="0"/>
-              </a:rPr>
-              <a:t>Trie</a:t>
-            </a:r>
-            <a:r>
-              <a:rPr lang="pl-PL" sz="1300" b="1" dirty="0">
-                <a:latin typeface="Arial" panose="020B0604020202020204" pitchFamily="34" charset="0"/>
-                <a:cs typeface="Arial" panose="020B0604020202020204" pitchFamily="34" charset="0"/>
-              </a:rPr>
-              <a:t> (</a:t>
-            </a:r>
-            <a:r>
-              <a:rPr lang="pl-PL" sz="1300" b="1" dirty="0" err="1">
-                <a:latin typeface="Arial" panose="020B0604020202020204" pitchFamily="34" charset="0"/>
-                <a:cs typeface="Arial" panose="020B0604020202020204" pitchFamily="34" charset="0"/>
-              </a:rPr>
-              <a:t>Prefix</a:t>
-            </a:r>
-            <a:r>
-              <a:rPr lang="pl-PL" sz="1300" b="1" dirty="0">
-                <a:latin typeface="Arial" panose="020B0604020202020204" pitchFamily="34" charset="0"/>
-                <a:cs typeface="Arial" panose="020B0604020202020204" pitchFamily="34" charset="0"/>
-              </a:rPr>
-              <a:t> </a:t>
-            </a:r>
-            <a:r>
-              <a:rPr lang="pl-PL" sz="1300" b="1" dirty="0" err="1">
-                <a:latin typeface="Arial" panose="020B0604020202020204" pitchFamily="34" charset="0"/>
-                <a:cs typeface="Arial" panose="020B0604020202020204" pitchFamily="34" charset="0"/>
-              </a:rPr>
-              <a:t>Tree</a:t>
-            </a:r>
-            <a:r>
-              <a:rPr lang="pl-PL" sz="1300" b="1" dirty="0">
-                <a:latin typeface="Arial" panose="020B0604020202020204" pitchFamily="34" charset="0"/>
-                <a:cs typeface="Arial" panose="020B0604020202020204" pitchFamily="34" charset="0"/>
-              </a:rPr>
-              <a:t>)</a:t>
-            </a:r>
-            <a:endParaRPr lang="pl-PL" sz="1300" b="1" dirty="0">
-              <a:solidFill>
-                <a:srgbClr val="000000"/>
-              </a:solidFill>
-              <a:latin typeface="Arial" panose="020B0604020202020204" pitchFamily="34" charset="0"/>
-              <a:ea typeface="Calibri"/>
-              <a:cs typeface="Arial" panose="020B0604020202020204" pitchFamily="34" charset="0"/>
-            </a:endParaRPr>
-          </a:p>
-          <a:p>
-            <a:pPr lvl="1">
-              <a:buFont typeface="Wingdings" panose="05000000000000000000" pitchFamily="2" charset="2"/>
-              <a:buChar char="Ø"/>
-            </a:pPr>
-            <a:r>
-              <a:rPr lang="pl-PL" sz="1300" b="1" dirty="0">
-                <a:solidFill>
-                  <a:srgbClr val="000000"/>
-                </a:solidFill>
-                <a:latin typeface="Arial" panose="020B0604020202020204" pitchFamily="34" charset="0"/>
-                <a:ea typeface="Calibri"/>
-                <a:cs typeface="Arial" panose="020B0604020202020204" pitchFamily="34" charset="0"/>
-              </a:rPr>
-              <a:t>Kopiec binarny (</a:t>
-            </a:r>
-            <a:r>
-              <a:rPr lang="pl-PL" sz="1300" b="1" dirty="0" err="1">
-                <a:solidFill>
-                  <a:srgbClr val="000000"/>
-                </a:solidFill>
-                <a:latin typeface="Arial" panose="020B0604020202020204" pitchFamily="34" charset="0"/>
-                <a:ea typeface="Calibri"/>
-                <a:cs typeface="Arial" panose="020B0604020202020204" pitchFamily="34" charset="0"/>
-              </a:rPr>
-              <a:t>Binary</a:t>
-            </a:r>
-            <a:r>
-              <a:rPr lang="pl-PL" sz="1300" b="1" dirty="0">
-                <a:solidFill>
-                  <a:srgbClr val="000000"/>
-                </a:solidFill>
-                <a:latin typeface="Arial" panose="020B0604020202020204" pitchFamily="34" charset="0"/>
-                <a:ea typeface="Calibri"/>
-                <a:cs typeface="Arial" panose="020B0604020202020204" pitchFamily="34" charset="0"/>
-              </a:rPr>
-              <a:t> </a:t>
-            </a:r>
-            <a:r>
-              <a:rPr lang="pl-PL" sz="1300" b="1" dirty="0" err="1">
-                <a:solidFill>
-                  <a:srgbClr val="000000"/>
-                </a:solidFill>
-                <a:latin typeface="Arial" panose="020B0604020202020204" pitchFamily="34" charset="0"/>
-                <a:ea typeface="Calibri"/>
-                <a:cs typeface="Arial" panose="020B0604020202020204" pitchFamily="34" charset="0"/>
-              </a:rPr>
-              <a:t>Heap</a:t>
-            </a:r>
-            <a:r>
-              <a:rPr lang="pl-PL" sz="1300" b="1" dirty="0">
-                <a:solidFill>
-                  <a:srgbClr val="000000"/>
-                </a:solidFill>
-                <a:latin typeface="Arial" panose="020B0604020202020204" pitchFamily="34" charset="0"/>
-                <a:ea typeface="Calibri"/>
-                <a:cs typeface="Arial" panose="020B0604020202020204" pitchFamily="34" charset="0"/>
-              </a:rPr>
-              <a:t>)</a:t>
-            </a:r>
-          </a:p>
-          <a:p>
-            <a:pPr lvl="1">
-              <a:buFont typeface="Wingdings" panose="05000000000000000000" pitchFamily="2" charset="2"/>
-              <a:buChar char="Ø"/>
-            </a:pPr>
-            <a:r>
-              <a:rPr lang="pl-PL" sz="1300" b="1" dirty="0">
-                <a:solidFill>
-                  <a:srgbClr val="000000"/>
-                </a:solidFill>
-                <a:latin typeface="Arial" panose="020B0604020202020204" pitchFamily="34" charset="0"/>
-                <a:ea typeface="Calibri"/>
-                <a:cs typeface="Arial" panose="020B0604020202020204" pitchFamily="34" charset="0"/>
-              </a:rPr>
-              <a:t>Drzewa czerwono-czarne (Red-Black </a:t>
-            </a:r>
-            <a:r>
-              <a:rPr lang="pl-PL" sz="1300" b="1" dirty="0" err="1">
-                <a:solidFill>
-                  <a:srgbClr val="000000"/>
-                </a:solidFill>
-                <a:latin typeface="Arial" panose="020B0604020202020204" pitchFamily="34" charset="0"/>
-                <a:ea typeface="Calibri"/>
-                <a:cs typeface="Arial" panose="020B0604020202020204" pitchFamily="34" charset="0"/>
-              </a:rPr>
-              <a:t>Trees</a:t>
-            </a:r>
-            <a:r>
-              <a:rPr lang="pl-PL" sz="1300" b="1" dirty="0">
-                <a:solidFill>
-                  <a:srgbClr val="000000"/>
-                </a:solidFill>
-                <a:latin typeface="Arial" panose="020B0604020202020204" pitchFamily="34" charset="0"/>
-                <a:ea typeface="Calibri"/>
-                <a:cs typeface="Arial" panose="020B0604020202020204" pitchFamily="34" charset="0"/>
-              </a:rPr>
-              <a:t>)</a:t>
-            </a:r>
-          </a:p>
-          <a:p>
-            <a:pPr>
-              <a:buFont typeface="Wingdings" panose="05000000000000000000" pitchFamily="2" charset="2"/>
-              <a:buChar char="Ø"/>
-            </a:pPr>
-            <a:r>
-              <a:rPr lang="pl-PL" sz="1700" b="1" dirty="0">
-                <a:latin typeface="Arial" panose="020B0604020202020204" pitchFamily="34" charset="0"/>
-                <a:cs typeface="Arial" panose="020B0604020202020204" pitchFamily="34" charset="0"/>
-              </a:rPr>
-              <a:t>Reprezentacja drzew i grafów w </a:t>
-            </a:r>
-            <a:r>
-              <a:rPr lang="pl-PL" sz="1700" b="1" dirty="0" err="1">
-                <a:latin typeface="Arial" panose="020B0604020202020204" pitchFamily="34" charset="0"/>
-                <a:cs typeface="Arial" panose="020B0604020202020204" pitchFamily="34" charset="0"/>
-              </a:rPr>
-              <a:t>Pythonie</a:t>
-            </a:r>
-            <a:endParaRPr lang="pl-PL" sz="1700" b="1" dirty="0">
-              <a:latin typeface="Arial" panose="020B0604020202020204" pitchFamily="34" charset="0"/>
-              <a:cs typeface="Arial" panose="020B0604020202020204" pitchFamily="34" charset="0"/>
-            </a:endParaRPr>
-          </a:p>
-          <a:p>
-            <a:pPr>
-              <a:buFont typeface="Wingdings" panose="05000000000000000000" pitchFamily="2" charset="2"/>
-              <a:buChar char="Ø"/>
-            </a:pPr>
-            <a:r>
-              <a:rPr lang="pl-PL" sz="1700" b="1" dirty="0">
-                <a:latin typeface="Arial" panose="020B0604020202020204" pitchFamily="34" charset="0"/>
-                <a:cs typeface="Arial" panose="020B0604020202020204" pitchFamily="34" charset="0"/>
-              </a:rPr>
-              <a:t>Przeszukiwanie grafu: </a:t>
-            </a:r>
-            <a:r>
-              <a:rPr lang="pl-PL" sz="1700" b="1" dirty="0" err="1">
-                <a:latin typeface="Arial" panose="020B0604020202020204" pitchFamily="34" charset="0"/>
-                <a:cs typeface="Arial" panose="020B0604020202020204" pitchFamily="34" charset="0"/>
-              </a:rPr>
-              <a:t>BFS</a:t>
-            </a:r>
-            <a:r>
-              <a:rPr lang="pl-PL" sz="1700" b="1" dirty="0">
-                <a:latin typeface="Arial" panose="020B0604020202020204" pitchFamily="34" charset="0"/>
-                <a:cs typeface="Arial" panose="020B0604020202020204" pitchFamily="34" charset="0"/>
-              </a:rPr>
-              <a:t> i </a:t>
-            </a:r>
-            <a:r>
-              <a:rPr lang="pl-PL" sz="1700" b="1" dirty="0" err="1">
-                <a:latin typeface="Arial" panose="020B0604020202020204" pitchFamily="34" charset="0"/>
-                <a:cs typeface="Arial" panose="020B0604020202020204" pitchFamily="34" charset="0"/>
-              </a:rPr>
-              <a:t>DFS</a:t>
-            </a:r>
-            <a:endParaRPr lang="pl-PL" sz="1700" b="1" dirty="0">
-              <a:latin typeface="Arial" panose="020B0604020202020204" pitchFamily="34" charset="0"/>
-              <a:cs typeface="Arial" panose="020B0604020202020204" pitchFamily="34" charset="0"/>
-            </a:endParaRPr>
-          </a:p>
-          <a:p>
-            <a:pPr>
-              <a:buFont typeface="Wingdings" panose="05000000000000000000" pitchFamily="2" charset="2"/>
-              <a:buChar char="Ø"/>
-            </a:pPr>
-            <a:r>
-              <a:rPr lang="pl-PL" sz="1700" b="1" dirty="0">
-                <a:latin typeface="Arial" panose="020B0604020202020204" pitchFamily="34" charset="0"/>
-                <a:cs typeface="Arial" panose="020B0604020202020204" pitchFamily="34" charset="0"/>
-              </a:rPr>
-              <a:t>Podsumowanie</a:t>
-            </a:r>
-          </a:p>
-          <a:p>
-            <a:pPr>
-              <a:buFont typeface="Wingdings" panose="05000000000000000000" pitchFamily="2" charset="2"/>
-              <a:buChar char="Ø"/>
-            </a:pPr>
-            <a:r>
-              <a:rPr lang="pl-PL" sz="1700" b="1" dirty="0">
-                <a:latin typeface="Arial" panose="020B0604020202020204" pitchFamily="34" charset="0"/>
-                <a:cs typeface="Arial" panose="020B0604020202020204" pitchFamily="34" charset="0"/>
-              </a:rPr>
-              <a:t>Quiz i część praktyczna</a:t>
-            </a:r>
-          </a:p>
-          <a:p>
-            <a:pPr>
-              <a:buFont typeface="Wingdings" panose="05000000000000000000" pitchFamily="2" charset="2"/>
-              <a:buChar char="Ø"/>
-            </a:pPr>
-            <a:endParaRPr lang="pl-PL" sz="2000" dirty="0">
-              <a:solidFill>
-                <a:srgbClr val="000000"/>
-              </a:solidFill>
-              <a:latin typeface="Arial" panose="020B0604020202020204" pitchFamily="34" charset="0"/>
-              <a:ea typeface="Calibri"/>
-              <a:cs typeface="Arial" panose="020B0604020202020204" pitchFamily="34" charset="0"/>
-            </a:endParaRPr>
-          </a:p>
-          <a:p>
-            <a:pPr lvl="1">
-              <a:buFont typeface="Wingdings" panose="05000000000000000000" pitchFamily="2" charset="2"/>
-              <a:buChar char="Ø"/>
-            </a:pPr>
-            <a:endParaRPr lang="en-US" sz="1600" b="1" dirty="0">
-              <a:solidFill>
-                <a:srgbClr val="000000"/>
-              </a:solidFill>
-              <a:latin typeface="Arial" panose="020B0604020202020204" pitchFamily="34" charset="0"/>
-              <a:ea typeface="Calibri"/>
-              <a:cs typeface="Arial" panose="020B0604020202020204" pitchFamily="34" charset="0"/>
-            </a:endParaRPr>
-          </a:p>
-        </p:txBody>
-      </p:sp>
-    </p:spTree>
-    <p:extLst>
-      <p:ext uri="{BB962C8B-B14F-4D97-AF65-F5344CB8AC3E}">
-        <p14:creationId xmlns:p14="http://schemas.microsoft.com/office/powerpoint/2010/main" val="3711920479"/>
-      </p:ext>
-    </p:extLst>
-  </p:cSld>
-  <p:clrMapOvr>
-    <a:masterClrMapping/>
-  </p:clrMapOvr>
-</p:sld>
-</file>
-
-<file path=ppt/slides/slide20.xml><?xml version="1.0" encoding="utf-8"?>
+<file path=ppt/slides/slide21.xml><?xml version="1.0" encoding="utf-8"?>
 <p:sld xmlns:a="http://schemas.openxmlformats.org/drawingml/2006/main" xmlns:r="http://schemas.openxmlformats.org/officeDocument/2006/relationships" xmlns:p="http://schemas.openxmlformats.org/presentationml/2006/main">
   <p:cSld>
     <p:spTree>
@@ -9006,7 +9245,7 @@
 </p:sld>
 </file>
 
-<file path=ppt/slides/slide21.xml><?xml version="1.0" encoding="utf-8"?>
+<file path=ppt/slides/slide22.xml><?xml version="1.0" encoding="utf-8"?>
 <p:sld xmlns:a="http://schemas.openxmlformats.org/drawingml/2006/main" xmlns:r="http://schemas.openxmlformats.org/officeDocument/2006/relationships" xmlns:p="http://schemas.openxmlformats.org/presentationml/2006/main">
   <p:cSld>
     <p:spTree>
@@ -9203,7 +9442,7 @@
 </p:sld>
 </file>
 
-<file path=ppt/slides/slide22.xml><?xml version="1.0" encoding="utf-8"?>
+<file path=ppt/slides/slide23.xml><?xml version="1.0" encoding="utf-8"?>
 <p:sld xmlns:a="http://schemas.openxmlformats.org/drawingml/2006/main" xmlns:r="http://schemas.openxmlformats.org/officeDocument/2006/relationships" xmlns:p="http://schemas.openxmlformats.org/presentationml/2006/main">
   <p:cSld>
     <p:spTree>
@@ -9391,7 +9630,7 @@
 </p:sld>
 </file>
 
-<file path=ppt/slides/slide23.xml><?xml version="1.0" encoding="utf-8"?>
+<file path=ppt/slides/slide24.xml><?xml version="1.0" encoding="utf-8"?>
 <p:sld xmlns:a="http://schemas.openxmlformats.org/drawingml/2006/main" xmlns:r="http://schemas.openxmlformats.org/officeDocument/2006/relationships" xmlns:p="http://schemas.openxmlformats.org/presentationml/2006/main">
   <p:cSld>
     <p:spTree>
@@ -9696,7 +9935,7 @@
 </p:sld>
 </file>
 
-<file path=ppt/slides/slide24.xml><?xml version="1.0" encoding="utf-8"?>
+<file path=ppt/slides/slide25.xml><?xml version="1.0" encoding="utf-8"?>
 <p:sld xmlns:a="http://schemas.openxmlformats.org/drawingml/2006/main" xmlns:r="http://schemas.openxmlformats.org/officeDocument/2006/relationships" xmlns:p="http://schemas.openxmlformats.org/presentationml/2006/main">
   <p:cSld>
     <p:spTree>
@@ -9794,7 +10033,7 @@
 </p:sld>
 </file>
 
-<file path=ppt/slides/slide25.xml><?xml version="1.0" encoding="utf-8"?>
+<file path=ppt/slides/slide26.xml><?xml version="1.0" encoding="utf-8"?>
 <p:sld xmlns:a="http://schemas.openxmlformats.org/drawingml/2006/main" xmlns:r="http://schemas.openxmlformats.org/officeDocument/2006/relationships" xmlns:p="http://schemas.openxmlformats.org/presentationml/2006/main">
   <p:cSld>
     <p:spTree>
@@ -10118,7 +10357,7 @@
 </p:sld>
 </file>
 
-<file path=ppt/slides/slide26.xml><?xml version="1.0" encoding="utf-8"?>
+<file path=ppt/slides/slide27.xml><?xml version="1.0" encoding="utf-8"?>
 <p:sld xmlns:a="http://schemas.openxmlformats.org/drawingml/2006/main" xmlns:r="http://schemas.openxmlformats.org/officeDocument/2006/relationships" xmlns:p="http://schemas.openxmlformats.org/presentationml/2006/main">
   <p:cSld>
     <p:spTree>
@@ -10510,7 +10749,7 @@
                 <a:latin typeface="Arial" panose="020B0604020202020204" pitchFamily="34" charset="0"/>
                 <a:cs typeface="Arial" panose="020B0604020202020204" pitchFamily="34" charset="0"/>
               </a:rPr>
-              <a:t>.</a:t>
+              <a:t>, a wynik zinterpretować z przeciwnymi znakami.</a:t>
             </a:r>
           </a:p>
         </p:txBody>
@@ -10528,7 +10767,7 @@
 </p:sld>
 </file>
 
-<file path=ppt/slides/slide27.xml><?xml version="1.0" encoding="utf-8"?>
+<file path=ppt/slides/slide28.xml><?xml version="1.0" encoding="utf-8"?>
 <p:sld xmlns:a="http://schemas.openxmlformats.org/drawingml/2006/main" xmlns:r="http://schemas.openxmlformats.org/officeDocument/2006/relationships" xmlns:p="http://schemas.openxmlformats.org/presentationml/2006/main">
   <p:cSld>
     <p:spTree>
@@ -10755,7 +10994,7 @@
                 <a:latin typeface="Arial" panose="020B0604020202020204" pitchFamily="34" charset="0"/>
                 <a:cs typeface="Arial" panose="020B0604020202020204" pitchFamily="34" charset="0"/>
               </a:rPr>
-              <a:t>(ale nie w drugą stronę)</a:t>
+              <a:t>(za to czarny węzeł może mieć czarne dzieci)</a:t>
             </a:r>
           </a:p>
           <a:p>
@@ -11102,7 +11341,7 @@
 </p:sld>
 </file>
 
-<file path=ppt/slides/slide28.xml><?xml version="1.0" encoding="utf-8"?>
+<file path=ppt/slides/slide29.xml><?xml version="1.0" encoding="utf-8"?>
 <p:sld xmlns:a="http://schemas.openxmlformats.org/drawingml/2006/main" xmlns:r="http://schemas.openxmlformats.org/officeDocument/2006/relationships" xmlns:p="http://schemas.openxmlformats.org/presentationml/2006/main">
   <p:cSld>
     <p:spTree>
@@ -11261,7 +11500,532 @@
 </p:sld>
 </file>
 
-<file path=ppt/slides/slide29.xml><?xml version="1.0" encoding="utf-8"?>
+<file path=ppt/slides/slide3.xml><?xml version="1.0" encoding="utf-8"?>
+<p:sld xmlns:a="http://schemas.openxmlformats.org/drawingml/2006/main" xmlns:r="http://schemas.openxmlformats.org/officeDocument/2006/relationships" xmlns:p="http://schemas.openxmlformats.org/presentationml/2006/main">
+  <p:cSld>
+    <p:spTree>
+      <p:nvGrpSpPr>
+        <p:cNvPr id="1" name="">
+          <a:extLst>
+            <a:ext uri="{FF2B5EF4-FFF2-40B4-BE49-F238E27FC236}">
+              <a16:creationId xmlns:a16="http://schemas.microsoft.com/office/drawing/2014/main" id="{E10E1BCD-310A-23FD-269E-C7D568B8EA7A}"/>
+            </a:ext>
+          </a:extLst>
+        </p:cNvPr>
+        <p:cNvGrpSpPr/>
+        <p:nvPr/>
+      </p:nvGrpSpPr>
+      <p:grpSpPr>
+        <a:xfrm>
+          <a:off x="0" y="0"/>
+          <a:ext cx="0" cy="0"/>
+          <a:chOff x="0" y="0"/>
+          <a:chExt cx="0" cy="0"/>
+        </a:xfrm>
+      </p:grpSpPr>
+      <p:sp>
+        <p:nvSpPr>
+          <p:cNvPr id="2" name="Tytuł 1">
+            <a:extLst>
+              <a:ext uri="{FF2B5EF4-FFF2-40B4-BE49-F238E27FC236}">
+                <a16:creationId xmlns:a16="http://schemas.microsoft.com/office/drawing/2014/main" id="{C10FA115-7A80-0E27-3BAA-B16745C0A8EC}"/>
+              </a:ext>
+            </a:extLst>
+          </p:cNvPr>
+          <p:cNvSpPr>
+            <a:spLocks noGrp="1"/>
+          </p:cNvSpPr>
+          <p:nvPr>
+            <p:ph type="title"/>
+          </p:nvPr>
+        </p:nvSpPr>
+        <p:spPr/>
+        <p:txBody>
+          <a:bodyPr/>
+          <a:lstStyle/>
+          <a:p>
+            <a:pPr algn="ctr"/>
+            <a:r>
+              <a:rPr lang="pl-PL" b="1" dirty="0">
+                <a:latin typeface="Arial" panose="020B0604020202020204" pitchFamily="34" charset="0"/>
+                <a:cs typeface="Arial" panose="020B0604020202020204" pitchFamily="34" charset="0"/>
+              </a:rPr>
+              <a:t>Stos i kolejka – porównanie </a:t>
+            </a:r>
+          </a:p>
+        </p:txBody>
+      </p:sp>
+      <p:sp>
+        <p:nvSpPr>
+          <p:cNvPr id="3" name="Symbol zastępczy zawartości 2">
+            <a:extLst>
+              <a:ext uri="{FF2B5EF4-FFF2-40B4-BE49-F238E27FC236}">
+                <a16:creationId xmlns:a16="http://schemas.microsoft.com/office/drawing/2014/main" id="{CF913DBD-FAD2-F5CA-61DC-CCE9A4CAFCDD}"/>
+              </a:ext>
+            </a:extLst>
+          </p:cNvPr>
+          <p:cNvSpPr>
+            <a:spLocks noGrp="1"/>
+          </p:cNvSpPr>
+          <p:nvPr>
+            <p:ph type="body" idx="1"/>
+          </p:nvPr>
+        </p:nvSpPr>
+        <p:spPr>
+          <a:xfrm>
+            <a:off x="662232" y="1269207"/>
+            <a:ext cx="5157787" cy="823912"/>
+          </a:xfrm>
+        </p:spPr>
+        <p:txBody>
+          <a:bodyPr>
+            <a:normAutofit/>
+          </a:bodyPr>
+          <a:lstStyle/>
+          <a:p>
+            <a:pPr algn="ctr"/>
+            <a:r>
+              <a:rPr lang="pl-PL" dirty="0"/>
+              <a:t>Stos (</a:t>
+            </a:r>
+            <a:r>
+              <a:rPr lang="pl-PL" dirty="0" err="1"/>
+              <a:t>Stack</a:t>
+            </a:r>
+            <a:r>
+              <a:rPr lang="pl-PL" dirty="0"/>
+              <a:t>)</a:t>
+            </a:r>
+          </a:p>
+        </p:txBody>
+      </p:sp>
+      <p:sp>
+        <p:nvSpPr>
+          <p:cNvPr id="6" name="Symbol zastępczy zawartości 5">
+            <a:extLst>
+              <a:ext uri="{FF2B5EF4-FFF2-40B4-BE49-F238E27FC236}">
+                <a16:creationId xmlns:a16="http://schemas.microsoft.com/office/drawing/2014/main" id="{6C27D5C6-6AE2-E4AB-3D4C-A2CD2B1D1558}"/>
+              </a:ext>
+            </a:extLst>
+          </p:cNvPr>
+          <p:cNvSpPr>
+            <a:spLocks noGrp="1"/>
+          </p:cNvSpPr>
+          <p:nvPr>
+            <p:ph sz="half" idx="2"/>
+          </p:nvPr>
+        </p:nvSpPr>
+        <p:spPr>
+          <a:xfrm>
+            <a:off x="6819728" y="2093119"/>
+            <a:ext cx="3881779" cy="3684588"/>
+          </a:xfrm>
+        </p:spPr>
+        <p:txBody>
+          <a:bodyPr/>
+          <a:lstStyle/>
+          <a:p>
+            <a:pPr>
+              <a:buFont typeface="Wingdings" panose="05000000000000000000" pitchFamily="2" charset="2"/>
+              <a:buChar char="Ø"/>
+            </a:pPr>
+            <a:r>
+              <a:rPr lang="pl-PL" sz="1600" dirty="0" err="1">
+                <a:latin typeface="Arial" panose="020B0604020202020204" pitchFamily="34" charset="0"/>
+                <a:cs typeface="Arial" panose="020B0604020202020204" pitchFamily="34" charset="0"/>
+              </a:rPr>
+              <a:t>FIFO</a:t>
+            </a:r>
+            <a:r>
+              <a:rPr lang="pl-PL" sz="1600" dirty="0">
+                <a:latin typeface="Arial" panose="020B0604020202020204" pitchFamily="34" charset="0"/>
+                <a:cs typeface="Arial" panose="020B0604020202020204" pitchFamily="34" charset="0"/>
+              </a:rPr>
+              <a:t> (First In, First Out) </a:t>
+            </a:r>
+          </a:p>
+          <a:p>
+            <a:pPr>
+              <a:buFont typeface="Wingdings" panose="05000000000000000000" pitchFamily="2" charset="2"/>
+              <a:buChar char="Ø"/>
+            </a:pPr>
+            <a:r>
+              <a:rPr lang="pl-PL" sz="1600" dirty="0">
+                <a:latin typeface="Arial" panose="020B0604020202020204" pitchFamily="34" charset="0"/>
+                <a:cs typeface="Arial" panose="020B0604020202020204" pitchFamily="34" charset="0"/>
+              </a:rPr>
+              <a:t>proste operacje:</a:t>
+            </a:r>
+          </a:p>
+          <a:p>
+            <a:pPr lvl="1">
+              <a:buFont typeface="Wingdings" panose="05000000000000000000" pitchFamily="2" charset="2"/>
+              <a:buChar char="Ø"/>
+            </a:pPr>
+            <a:r>
+              <a:rPr lang="pl-PL" sz="1200" b="1" dirty="0" err="1">
+                <a:latin typeface="Arial" panose="020B0604020202020204" pitchFamily="34" charset="0"/>
+                <a:cs typeface="Arial" panose="020B0604020202020204" pitchFamily="34" charset="0"/>
+              </a:rPr>
+              <a:t>enqueue</a:t>
+            </a:r>
+            <a:endParaRPr lang="pl-PL" sz="1200" b="1" dirty="0">
+              <a:latin typeface="Arial" panose="020B0604020202020204" pitchFamily="34" charset="0"/>
+              <a:cs typeface="Arial" panose="020B0604020202020204" pitchFamily="34" charset="0"/>
+            </a:endParaRPr>
+          </a:p>
+          <a:p>
+            <a:pPr lvl="1">
+              <a:buFont typeface="Wingdings" panose="05000000000000000000" pitchFamily="2" charset="2"/>
+              <a:buChar char="Ø"/>
+            </a:pPr>
+            <a:r>
+              <a:rPr lang="pl-PL" sz="1200" b="1" dirty="0" err="1">
+                <a:latin typeface="Arial" panose="020B0604020202020204" pitchFamily="34" charset="0"/>
+                <a:cs typeface="Arial" panose="020B0604020202020204" pitchFamily="34" charset="0"/>
+              </a:rPr>
+              <a:t>dequeue</a:t>
+            </a:r>
+            <a:endParaRPr lang="pl-PL" sz="1200" b="1" dirty="0">
+              <a:latin typeface="Arial" panose="020B0604020202020204" pitchFamily="34" charset="0"/>
+              <a:cs typeface="Arial" panose="020B0604020202020204" pitchFamily="34" charset="0"/>
+            </a:endParaRPr>
+          </a:p>
+          <a:p>
+            <a:pPr>
+              <a:buFont typeface="Wingdings" panose="05000000000000000000" pitchFamily="2" charset="2"/>
+              <a:buChar char="Ø"/>
+            </a:pPr>
+            <a:r>
+              <a:rPr lang="pl-PL" sz="1600" dirty="0">
+                <a:latin typeface="Arial" panose="020B0604020202020204" pitchFamily="34" charset="0"/>
+                <a:cs typeface="Arial" panose="020B0604020202020204" pitchFamily="34" charset="0"/>
+              </a:rPr>
+              <a:t>złożoność operacji: </a:t>
+            </a:r>
+            <a:r>
+              <a:rPr lang="pl-PL" sz="1600" b="1" dirty="0">
+                <a:latin typeface="Arial" panose="020B0604020202020204" pitchFamily="34" charset="0"/>
+                <a:cs typeface="Arial" panose="020B0604020202020204" pitchFamily="34" charset="0"/>
+              </a:rPr>
+              <a:t>O(1)</a:t>
+            </a:r>
+          </a:p>
+          <a:p>
+            <a:pPr marL="0" indent="0">
+              <a:buNone/>
+            </a:pPr>
+            <a:r>
+              <a:rPr lang="pl-PL" sz="1600" b="1" dirty="0">
+                <a:solidFill>
+                  <a:srgbClr val="FF0000"/>
+                </a:solidFill>
+                <a:latin typeface="Arial" panose="020B0604020202020204" pitchFamily="34" charset="0"/>
+                <a:cs typeface="Arial" panose="020B0604020202020204" pitchFamily="34" charset="0"/>
+              </a:rPr>
+              <a:t>⚠</a:t>
+            </a:r>
+            <a:r>
+              <a:rPr lang="pl-PL" sz="1600" dirty="0">
+                <a:latin typeface="Arial" panose="020B0604020202020204" pitchFamily="34" charset="0"/>
+                <a:cs typeface="Arial" panose="020B0604020202020204" pitchFamily="34" charset="0"/>
+              </a:rPr>
+              <a:t> brak elastycznego dostępu do środka;</a:t>
+            </a:r>
+            <a:br>
+              <a:rPr lang="pl-PL" sz="1600" dirty="0">
+                <a:latin typeface="Arial" panose="020B0604020202020204" pitchFamily="34" charset="0"/>
+                <a:cs typeface="Arial" panose="020B0604020202020204" pitchFamily="34" charset="0"/>
+              </a:rPr>
+            </a:br>
+            <a:r>
+              <a:rPr lang="pl-PL" sz="1600" dirty="0">
+                <a:latin typeface="Arial" panose="020B0604020202020204" pitchFamily="34" charset="0"/>
+                <a:cs typeface="Arial" panose="020B0604020202020204" pitchFamily="34" charset="0"/>
+              </a:rPr>
+              <a:t>„kto pierwszy, ten lepszy”</a:t>
+            </a:r>
+          </a:p>
+          <a:p>
+            <a:endParaRPr lang="pl-PL" dirty="0"/>
+          </a:p>
+        </p:txBody>
+      </p:sp>
+      <p:sp>
+        <p:nvSpPr>
+          <p:cNvPr id="7" name="Symbol zastępczy tekstu 6">
+            <a:extLst>
+              <a:ext uri="{FF2B5EF4-FFF2-40B4-BE49-F238E27FC236}">
+                <a16:creationId xmlns:a16="http://schemas.microsoft.com/office/drawing/2014/main" id="{903EE7D1-D442-D684-E381-CD6A4F4E8719}"/>
+              </a:ext>
+            </a:extLst>
+          </p:cNvPr>
+          <p:cNvSpPr>
+            <a:spLocks noGrp="1"/>
+          </p:cNvSpPr>
+          <p:nvPr>
+            <p:ph type="body" sz="quarter" idx="3"/>
+          </p:nvPr>
+        </p:nvSpPr>
+        <p:spPr>
+          <a:xfrm>
+            <a:off x="6169024" y="1269207"/>
+            <a:ext cx="5183188" cy="823912"/>
+          </a:xfrm>
+        </p:spPr>
+        <p:txBody>
+          <a:bodyPr>
+            <a:normAutofit/>
+          </a:bodyPr>
+          <a:lstStyle/>
+          <a:p>
+            <a:pPr algn="ctr"/>
+            <a:r>
+              <a:rPr lang="pl-PL" dirty="0">
+                <a:latin typeface="Arial" panose="020B0604020202020204" pitchFamily="34" charset="0"/>
+                <a:cs typeface="Arial" panose="020B0604020202020204" pitchFamily="34" charset="0"/>
+              </a:rPr>
+              <a:t>Kolejka (Queue)</a:t>
+            </a:r>
+            <a:endParaRPr lang="pl-PL" dirty="0"/>
+          </a:p>
+        </p:txBody>
+      </p:sp>
+      <p:sp>
+        <p:nvSpPr>
+          <p:cNvPr id="9" name="Symbol zastępczy zawartości 8">
+            <a:extLst>
+              <a:ext uri="{FF2B5EF4-FFF2-40B4-BE49-F238E27FC236}">
+                <a16:creationId xmlns:a16="http://schemas.microsoft.com/office/drawing/2014/main" id="{ED6243E2-B840-F890-4BE6-C9ACD0EB4CA5}"/>
+              </a:ext>
+            </a:extLst>
+          </p:cNvPr>
+          <p:cNvSpPr>
+            <a:spLocks noGrp="1"/>
+          </p:cNvSpPr>
+          <p:nvPr>
+            <p:ph sz="quarter" idx="4"/>
+          </p:nvPr>
+        </p:nvSpPr>
+        <p:spPr>
+          <a:xfrm>
+            <a:off x="1300236" y="2093119"/>
+            <a:ext cx="3881778" cy="3684588"/>
+          </a:xfrm>
+        </p:spPr>
+        <p:txBody>
+          <a:bodyPr>
+            <a:normAutofit/>
+          </a:bodyPr>
+          <a:lstStyle/>
+          <a:p>
+            <a:pPr>
+              <a:buFont typeface="Wingdings" panose="05000000000000000000" pitchFamily="2" charset="2"/>
+              <a:buChar char="Ø"/>
+            </a:pPr>
+            <a:r>
+              <a:rPr lang="pl-PL" sz="1600" dirty="0" err="1">
+                <a:latin typeface="Arial" panose="020B0604020202020204" pitchFamily="34" charset="0"/>
+                <a:cs typeface="Arial" panose="020B0604020202020204" pitchFamily="34" charset="0"/>
+              </a:rPr>
+              <a:t>LIFO</a:t>
+            </a:r>
+            <a:r>
+              <a:rPr lang="pl-PL" sz="1600" dirty="0">
+                <a:latin typeface="Arial" panose="020B0604020202020204" pitchFamily="34" charset="0"/>
+                <a:cs typeface="Arial" panose="020B0604020202020204" pitchFamily="34" charset="0"/>
+              </a:rPr>
+              <a:t> (</a:t>
+            </a:r>
+            <a:r>
+              <a:rPr lang="pl-PL" sz="1600" dirty="0" err="1">
+                <a:latin typeface="Arial" panose="020B0604020202020204" pitchFamily="34" charset="0"/>
+                <a:cs typeface="Arial" panose="020B0604020202020204" pitchFamily="34" charset="0"/>
+              </a:rPr>
+              <a:t>Last</a:t>
+            </a:r>
+            <a:r>
+              <a:rPr lang="pl-PL" sz="1600" dirty="0">
+                <a:latin typeface="Arial" panose="020B0604020202020204" pitchFamily="34" charset="0"/>
+                <a:cs typeface="Arial" panose="020B0604020202020204" pitchFamily="34" charset="0"/>
+              </a:rPr>
+              <a:t> In, First Out) </a:t>
+            </a:r>
+          </a:p>
+          <a:p>
+            <a:pPr>
+              <a:buFont typeface="Wingdings" panose="05000000000000000000" pitchFamily="2" charset="2"/>
+              <a:buChar char="Ø"/>
+            </a:pPr>
+            <a:r>
+              <a:rPr lang="pl-PL" sz="1600" dirty="0">
+                <a:latin typeface="Arial" panose="020B0604020202020204" pitchFamily="34" charset="0"/>
+                <a:cs typeface="Arial" panose="020B0604020202020204" pitchFamily="34" charset="0"/>
+              </a:rPr>
+              <a:t>proste operacje:</a:t>
+            </a:r>
+          </a:p>
+          <a:p>
+            <a:pPr lvl="1">
+              <a:buFont typeface="Wingdings" panose="05000000000000000000" pitchFamily="2" charset="2"/>
+              <a:buChar char="Ø"/>
+            </a:pPr>
+            <a:r>
+              <a:rPr lang="pl-PL" sz="1200" b="1" dirty="0" err="1">
+                <a:latin typeface="Arial" panose="020B0604020202020204" pitchFamily="34" charset="0"/>
+                <a:cs typeface="Arial" panose="020B0604020202020204" pitchFamily="34" charset="0"/>
+              </a:rPr>
+              <a:t>push</a:t>
+            </a:r>
+            <a:endParaRPr lang="pl-PL" sz="1200" b="1" dirty="0">
+              <a:latin typeface="Arial" panose="020B0604020202020204" pitchFamily="34" charset="0"/>
+              <a:cs typeface="Arial" panose="020B0604020202020204" pitchFamily="34" charset="0"/>
+            </a:endParaRPr>
+          </a:p>
+          <a:p>
+            <a:pPr lvl="1">
+              <a:buFont typeface="Wingdings" panose="05000000000000000000" pitchFamily="2" charset="2"/>
+              <a:buChar char="Ø"/>
+            </a:pPr>
+            <a:r>
+              <a:rPr lang="pl-PL" sz="1200" b="1" dirty="0">
+                <a:latin typeface="Arial" panose="020B0604020202020204" pitchFamily="34" charset="0"/>
+                <a:cs typeface="Arial" panose="020B0604020202020204" pitchFamily="34" charset="0"/>
+              </a:rPr>
+              <a:t>pop</a:t>
+            </a:r>
+          </a:p>
+          <a:p>
+            <a:pPr>
+              <a:buFont typeface="Wingdings" panose="05000000000000000000" pitchFamily="2" charset="2"/>
+              <a:buChar char="Ø"/>
+            </a:pPr>
+            <a:r>
+              <a:rPr lang="pl-PL" sz="1600" dirty="0">
+                <a:latin typeface="Arial" panose="020B0604020202020204" pitchFamily="34" charset="0"/>
+                <a:cs typeface="Arial" panose="020B0604020202020204" pitchFamily="34" charset="0"/>
+              </a:rPr>
+              <a:t>złożoność operacji:</a:t>
+            </a:r>
+            <a:r>
+              <a:rPr lang="pl-PL" sz="1600" b="1" dirty="0">
+                <a:latin typeface="Arial" panose="020B0604020202020204" pitchFamily="34" charset="0"/>
+                <a:cs typeface="Arial" panose="020B0604020202020204" pitchFamily="34" charset="0"/>
+              </a:rPr>
+              <a:t> O(1)</a:t>
+            </a:r>
+          </a:p>
+          <a:p>
+            <a:pPr marL="0" indent="0">
+              <a:buNone/>
+            </a:pPr>
+            <a:r>
+              <a:rPr lang="pl-PL" sz="1600" b="1" dirty="0">
+                <a:solidFill>
+                  <a:srgbClr val="FF0000"/>
+                </a:solidFill>
+                <a:latin typeface="Arial" panose="020B0604020202020204" pitchFamily="34" charset="0"/>
+                <a:cs typeface="Arial" panose="020B0604020202020204" pitchFamily="34" charset="0"/>
+              </a:rPr>
+              <a:t>⚠</a:t>
+            </a:r>
+            <a:r>
+              <a:rPr lang="pl-PL" sz="1600" dirty="0">
+                <a:latin typeface="Arial" panose="020B0604020202020204" pitchFamily="34" charset="0"/>
+                <a:cs typeface="Arial" panose="020B0604020202020204" pitchFamily="34" charset="0"/>
+              </a:rPr>
+              <a:t> brak elastycznego dostępu do środka;</a:t>
+            </a:r>
+            <a:br>
+              <a:rPr lang="pl-PL" sz="1600" dirty="0">
+                <a:latin typeface="Arial" panose="020B0604020202020204" pitchFamily="34" charset="0"/>
+                <a:cs typeface="Arial" panose="020B0604020202020204" pitchFamily="34" charset="0"/>
+              </a:rPr>
+            </a:br>
+            <a:r>
+              <a:rPr lang="pl-PL" sz="1600" dirty="0">
+                <a:latin typeface="Arial" panose="020B0604020202020204" pitchFamily="34" charset="0"/>
+                <a:cs typeface="Arial" panose="020B0604020202020204" pitchFamily="34" charset="0"/>
+              </a:rPr>
+              <a:t>obsługujemy tylko jeden koniec struktury</a:t>
+            </a:r>
+          </a:p>
+        </p:txBody>
+      </p:sp>
+      <p:pic>
+        <p:nvPicPr>
+          <p:cNvPr id="5" name="Obraz 4">
+            <a:extLst>
+              <a:ext uri="{FF2B5EF4-FFF2-40B4-BE49-F238E27FC236}">
+                <a16:creationId xmlns:a16="http://schemas.microsoft.com/office/drawing/2014/main" id="{C334589E-FD9E-3D2A-8F11-AED5FF17300A}"/>
+              </a:ext>
+            </a:extLst>
+          </p:cNvPr>
+          <p:cNvPicPr>
+            <a:picLocks noChangeAspect="1"/>
+          </p:cNvPicPr>
+          <p:nvPr/>
+        </p:nvPicPr>
+        <p:blipFill>
+          <a:blip r:embed="rId2"/>
+          <a:stretch>
+            <a:fillRect/>
+          </a:stretch>
+        </p:blipFill>
+        <p:spPr>
+          <a:xfrm>
+            <a:off x="1300237" y="4244122"/>
+            <a:ext cx="3881777" cy="2248753"/>
+          </a:xfrm>
+          <a:prstGeom prst="rect">
+            <a:avLst/>
+          </a:prstGeom>
+        </p:spPr>
+      </p:pic>
+      <p:pic>
+        <p:nvPicPr>
+          <p:cNvPr id="10" name="Obraz 9">
+            <a:extLst>
+              <a:ext uri="{FF2B5EF4-FFF2-40B4-BE49-F238E27FC236}">
+                <a16:creationId xmlns:a16="http://schemas.microsoft.com/office/drawing/2014/main" id="{949401CF-3928-5BD8-49CB-F21EB8103A6D}"/>
+              </a:ext>
+            </a:extLst>
+          </p:cNvPr>
+          <p:cNvPicPr>
+            <a:picLocks noChangeAspect="1"/>
+          </p:cNvPicPr>
+          <p:nvPr/>
+        </p:nvPicPr>
+        <p:blipFill>
+          <a:blip r:embed="rId3"/>
+          <a:stretch>
+            <a:fillRect/>
+          </a:stretch>
+        </p:blipFill>
+        <p:spPr>
+          <a:xfrm>
+            <a:off x="6268869" y="4442266"/>
+            <a:ext cx="4983496" cy="1985294"/>
+          </a:xfrm>
+          <a:prstGeom prst="rect">
+            <a:avLst/>
+          </a:prstGeom>
+        </p:spPr>
+      </p:pic>
+    </p:spTree>
+    <p:extLst>
+      <p:ext uri="{BB962C8B-B14F-4D97-AF65-F5344CB8AC3E}">
+        <p14:creationId xmlns:p14="http://schemas.microsoft.com/office/powerpoint/2010/main" val="1337473844"/>
+      </p:ext>
+    </p:extLst>
+  </p:cSld>
+  <p:clrMapOvr>
+    <a:masterClrMapping/>
+  </p:clrMapOvr>
+</p:sld>
+</file>
+
+<file path=ppt/slides/slide30.xml><?xml version="1.0" encoding="utf-8"?>
 <p:sld xmlns:a="http://schemas.openxmlformats.org/drawingml/2006/main" xmlns:r="http://schemas.openxmlformats.org/officeDocument/2006/relationships" xmlns:p="http://schemas.openxmlformats.org/presentationml/2006/main">
   <p:cSld>
     <p:spTree>
@@ -11420,491 +12184,7 @@
 </p:sld>
 </file>
 
-<file path=ppt/slides/slide3.xml><?xml version="1.0" encoding="utf-8"?>
-<p:sld xmlns:a="http://schemas.openxmlformats.org/drawingml/2006/main" xmlns:r="http://schemas.openxmlformats.org/officeDocument/2006/relationships" xmlns:p="http://schemas.openxmlformats.org/presentationml/2006/main">
-  <p:cSld>
-    <p:spTree>
-      <p:nvGrpSpPr>
-        <p:cNvPr id="1" name="">
-          <a:extLst>
-            <a:ext uri="{FF2B5EF4-FFF2-40B4-BE49-F238E27FC236}">
-              <a16:creationId xmlns:a16="http://schemas.microsoft.com/office/drawing/2014/main" id="{E10E1BCD-310A-23FD-269E-C7D568B8EA7A}"/>
-            </a:ext>
-          </a:extLst>
-        </p:cNvPr>
-        <p:cNvGrpSpPr/>
-        <p:nvPr/>
-      </p:nvGrpSpPr>
-      <p:grpSpPr>
-        <a:xfrm>
-          <a:off x="0" y="0"/>
-          <a:ext cx="0" cy="0"/>
-          <a:chOff x="0" y="0"/>
-          <a:chExt cx="0" cy="0"/>
-        </a:xfrm>
-      </p:grpSpPr>
-      <p:sp>
-        <p:nvSpPr>
-          <p:cNvPr id="2" name="Tytuł 1">
-            <a:extLst>
-              <a:ext uri="{FF2B5EF4-FFF2-40B4-BE49-F238E27FC236}">
-                <a16:creationId xmlns:a16="http://schemas.microsoft.com/office/drawing/2014/main" id="{C10FA115-7A80-0E27-3BAA-B16745C0A8EC}"/>
-              </a:ext>
-            </a:extLst>
-          </p:cNvPr>
-          <p:cNvSpPr>
-            <a:spLocks noGrp="1"/>
-          </p:cNvSpPr>
-          <p:nvPr>
-            <p:ph type="title"/>
-          </p:nvPr>
-        </p:nvSpPr>
-        <p:spPr/>
-        <p:txBody>
-          <a:bodyPr/>
-          <a:lstStyle/>
-          <a:p>
-            <a:pPr algn="ctr"/>
-            <a:r>
-              <a:rPr lang="pl-PL" b="1" dirty="0">
-                <a:latin typeface="Arial" panose="020B0604020202020204" pitchFamily="34" charset="0"/>
-                <a:cs typeface="Arial" panose="020B0604020202020204" pitchFamily="34" charset="0"/>
-              </a:rPr>
-              <a:t>Stos i kolejka – porównanie </a:t>
-            </a:r>
-          </a:p>
-        </p:txBody>
-      </p:sp>
-      <p:sp>
-        <p:nvSpPr>
-          <p:cNvPr id="3" name="Symbol zastępczy zawartości 2">
-            <a:extLst>
-              <a:ext uri="{FF2B5EF4-FFF2-40B4-BE49-F238E27FC236}">
-                <a16:creationId xmlns:a16="http://schemas.microsoft.com/office/drawing/2014/main" id="{CF913DBD-FAD2-F5CA-61DC-CCE9A4CAFCDD}"/>
-              </a:ext>
-            </a:extLst>
-          </p:cNvPr>
-          <p:cNvSpPr>
-            <a:spLocks noGrp="1"/>
-          </p:cNvSpPr>
-          <p:nvPr>
-            <p:ph type="body" idx="1"/>
-          </p:nvPr>
-        </p:nvSpPr>
-        <p:spPr/>
-        <p:txBody>
-          <a:bodyPr>
-            <a:normAutofit/>
-          </a:bodyPr>
-          <a:lstStyle/>
-          <a:p>
-            <a:pPr algn="ctr"/>
-            <a:r>
-              <a:rPr lang="pl-PL" dirty="0"/>
-              <a:t>Stos (</a:t>
-            </a:r>
-            <a:r>
-              <a:rPr lang="pl-PL" dirty="0" err="1"/>
-              <a:t>Stack</a:t>
-            </a:r>
-            <a:r>
-              <a:rPr lang="pl-PL" dirty="0"/>
-              <a:t>)</a:t>
-            </a:r>
-          </a:p>
-        </p:txBody>
-      </p:sp>
-      <p:sp>
-        <p:nvSpPr>
-          <p:cNvPr id="6" name="Symbol zastępczy zawartości 5">
-            <a:extLst>
-              <a:ext uri="{FF2B5EF4-FFF2-40B4-BE49-F238E27FC236}">
-                <a16:creationId xmlns:a16="http://schemas.microsoft.com/office/drawing/2014/main" id="{6C27D5C6-6AE2-E4AB-3D4C-A2CD2B1D1558}"/>
-              </a:ext>
-            </a:extLst>
-          </p:cNvPr>
-          <p:cNvSpPr>
-            <a:spLocks noGrp="1"/>
-          </p:cNvSpPr>
-          <p:nvPr>
-            <p:ph sz="half" idx="2"/>
-          </p:nvPr>
-        </p:nvSpPr>
-        <p:spPr>
-          <a:xfrm>
-            <a:off x="6371983" y="2612879"/>
-            <a:ext cx="5157787" cy="3684588"/>
-          </a:xfrm>
-        </p:spPr>
-        <p:txBody>
-          <a:bodyPr/>
-          <a:lstStyle/>
-          <a:p>
-            <a:pPr marL="0" indent="0">
-              <a:buNone/>
-            </a:pPr>
-            <a:r>
-              <a:rPr lang="pl-PL" sz="1600" dirty="0">
-                <a:solidFill>
-                  <a:srgbClr val="00A000"/>
-                </a:solidFill>
-                <a:latin typeface="Arial" panose="020B0604020202020204" pitchFamily="34" charset="0"/>
-                <a:cs typeface="Arial" panose="020B0604020202020204" pitchFamily="34" charset="0"/>
-              </a:rPr>
-              <a:t>✔</a:t>
-            </a:r>
-            <a:r>
-              <a:rPr lang="pl-PL" sz="1600" dirty="0">
-                <a:latin typeface="Arial" panose="020B0604020202020204" pitchFamily="34" charset="0"/>
-                <a:cs typeface="Arial" panose="020B0604020202020204" pitchFamily="34" charset="0"/>
-              </a:rPr>
-              <a:t> </a:t>
-            </a:r>
-            <a:r>
-              <a:rPr lang="pl-PL" sz="1600" dirty="0" err="1">
-                <a:latin typeface="Arial" panose="020B0604020202020204" pitchFamily="34" charset="0"/>
-                <a:cs typeface="Arial" panose="020B0604020202020204" pitchFamily="34" charset="0"/>
-              </a:rPr>
-              <a:t>FIFO</a:t>
-            </a:r>
-            <a:r>
-              <a:rPr lang="pl-PL" sz="1600" dirty="0">
-                <a:latin typeface="Arial" panose="020B0604020202020204" pitchFamily="34" charset="0"/>
-                <a:cs typeface="Arial" panose="020B0604020202020204" pitchFamily="34" charset="0"/>
-              </a:rPr>
-              <a:t> (First In, First Out) </a:t>
-            </a:r>
-          </a:p>
-          <a:p>
-            <a:pPr marL="0" indent="0">
-              <a:buNone/>
-            </a:pPr>
-            <a:r>
-              <a:rPr lang="pl-PL" sz="1600" dirty="0">
-                <a:solidFill>
-                  <a:srgbClr val="00A000"/>
-                </a:solidFill>
-                <a:latin typeface="Arial" panose="020B0604020202020204" pitchFamily="34" charset="0"/>
-                <a:cs typeface="Arial" panose="020B0604020202020204" pitchFamily="34" charset="0"/>
-              </a:rPr>
-              <a:t>✔</a:t>
-            </a:r>
-            <a:r>
-              <a:rPr lang="pl-PL" sz="1600" dirty="0">
-                <a:latin typeface="Arial" panose="020B0604020202020204" pitchFamily="34" charset="0"/>
-                <a:cs typeface="Arial" panose="020B0604020202020204" pitchFamily="34" charset="0"/>
-              </a:rPr>
-              <a:t> proste operacje: </a:t>
-            </a:r>
-            <a:r>
-              <a:rPr lang="pl-PL" sz="1600" dirty="0" err="1">
-                <a:latin typeface="Arial" panose="020B0604020202020204" pitchFamily="34" charset="0"/>
-                <a:cs typeface="Arial" panose="020B0604020202020204" pitchFamily="34" charset="0"/>
-              </a:rPr>
-              <a:t>enqueue</a:t>
-            </a:r>
-            <a:r>
-              <a:rPr lang="pl-PL" sz="1600" dirty="0">
-                <a:latin typeface="Arial" panose="020B0604020202020204" pitchFamily="34" charset="0"/>
-                <a:cs typeface="Arial" panose="020B0604020202020204" pitchFamily="34" charset="0"/>
-              </a:rPr>
-              <a:t>, </a:t>
-            </a:r>
-            <a:r>
-              <a:rPr lang="pl-PL" sz="1600" dirty="0" err="1">
-                <a:latin typeface="Arial" panose="020B0604020202020204" pitchFamily="34" charset="0"/>
-                <a:cs typeface="Arial" panose="020B0604020202020204" pitchFamily="34" charset="0"/>
-              </a:rPr>
-              <a:t>dequeue</a:t>
-            </a:r>
-            <a:endParaRPr lang="pl-PL" sz="1600" dirty="0">
-              <a:latin typeface="Arial" panose="020B0604020202020204" pitchFamily="34" charset="0"/>
-              <a:cs typeface="Arial" panose="020B0604020202020204" pitchFamily="34" charset="0"/>
-            </a:endParaRPr>
-          </a:p>
-          <a:p>
-            <a:pPr marL="0" indent="0">
-              <a:buNone/>
-            </a:pPr>
-            <a:r>
-              <a:rPr lang="pl-PL" sz="1600" dirty="0">
-                <a:solidFill>
-                  <a:srgbClr val="00A000"/>
-                </a:solidFill>
-                <a:latin typeface="Arial" panose="020B0604020202020204" pitchFamily="34" charset="0"/>
-                <a:cs typeface="Arial" panose="020B0604020202020204" pitchFamily="34" charset="0"/>
-              </a:rPr>
-              <a:t>✔</a:t>
-            </a:r>
-            <a:r>
-              <a:rPr lang="pl-PL" sz="1600" dirty="0">
-                <a:latin typeface="Arial" panose="020B0604020202020204" pitchFamily="34" charset="0"/>
-                <a:cs typeface="Arial" panose="020B0604020202020204" pitchFamily="34" charset="0"/>
-              </a:rPr>
-              <a:t> złożoność operacji: O(1)</a:t>
-            </a:r>
-          </a:p>
-          <a:p>
-            <a:pPr marL="0" indent="0">
-              <a:buNone/>
-            </a:pPr>
-            <a:r>
-              <a:rPr lang="pl-PL" sz="1600" b="1" dirty="0">
-                <a:solidFill>
-                  <a:srgbClr val="FF0000"/>
-                </a:solidFill>
-                <a:latin typeface="Arial" panose="020B0604020202020204" pitchFamily="34" charset="0"/>
-                <a:cs typeface="Arial" panose="020B0604020202020204" pitchFamily="34" charset="0"/>
-              </a:rPr>
-              <a:t>⚠</a:t>
-            </a:r>
-            <a:r>
-              <a:rPr lang="pl-PL" sz="1600" dirty="0">
-                <a:latin typeface="Arial" panose="020B0604020202020204" pitchFamily="34" charset="0"/>
-                <a:cs typeface="Arial" panose="020B0604020202020204" pitchFamily="34" charset="0"/>
-              </a:rPr>
-              <a:t> brak elastycznego dostępu do środka;</a:t>
-            </a:r>
-            <a:br>
-              <a:rPr lang="pl-PL" sz="1600" dirty="0">
-                <a:latin typeface="Arial" panose="020B0604020202020204" pitchFamily="34" charset="0"/>
-                <a:cs typeface="Arial" panose="020B0604020202020204" pitchFamily="34" charset="0"/>
-              </a:rPr>
-            </a:br>
-            <a:r>
-              <a:rPr lang="pl-PL" sz="1600" dirty="0">
-                <a:latin typeface="Arial" panose="020B0604020202020204" pitchFamily="34" charset="0"/>
-                <a:cs typeface="Arial" panose="020B0604020202020204" pitchFamily="34" charset="0"/>
-              </a:rPr>
-              <a:t>„kto pierwszy, ten lepszy”</a:t>
-            </a:r>
-          </a:p>
-          <a:p>
-            <a:endParaRPr lang="pl-PL" dirty="0"/>
-          </a:p>
-        </p:txBody>
-      </p:sp>
-      <p:sp>
-        <p:nvSpPr>
-          <p:cNvPr id="7" name="Symbol zastępczy tekstu 6">
-            <a:extLst>
-              <a:ext uri="{FF2B5EF4-FFF2-40B4-BE49-F238E27FC236}">
-                <a16:creationId xmlns:a16="http://schemas.microsoft.com/office/drawing/2014/main" id="{903EE7D1-D442-D684-E381-CD6A4F4E8719}"/>
-              </a:ext>
-            </a:extLst>
-          </p:cNvPr>
-          <p:cNvSpPr>
-            <a:spLocks noGrp="1"/>
-          </p:cNvSpPr>
-          <p:nvPr>
-            <p:ph type="body" sz="quarter" idx="3"/>
-          </p:nvPr>
-        </p:nvSpPr>
-        <p:spPr/>
-        <p:txBody>
-          <a:bodyPr>
-            <a:normAutofit/>
-          </a:bodyPr>
-          <a:lstStyle/>
-          <a:p>
-            <a:pPr algn="ctr"/>
-            <a:r>
-              <a:rPr lang="pl-PL" dirty="0">
-                <a:latin typeface="Arial" panose="020B0604020202020204" pitchFamily="34" charset="0"/>
-                <a:cs typeface="Arial" panose="020B0604020202020204" pitchFamily="34" charset="0"/>
-              </a:rPr>
-              <a:t>Kolejka (Queue)</a:t>
-            </a:r>
-            <a:endParaRPr lang="pl-PL" dirty="0"/>
-          </a:p>
-        </p:txBody>
-      </p:sp>
-      <p:sp>
-        <p:nvSpPr>
-          <p:cNvPr id="9" name="Symbol zastępczy zawartości 8">
-            <a:extLst>
-              <a:ext uri="{FF2B5EF4-FFF2-40B4-BE49-F238E27FC236}">
-                <a16:creationId xmlns:a16="http://schemas.microsoft.com/office/drawing/2014/main" id="{ED6243E2-B840-F890-4BE6-C9ACD0EB4CA5}"/>
-              </a:ext>
-            </a:extLst>
-          </p:cNvPr>
-          <p:cNvSpPr>
-            <a:spLocks noGrp="1"/>
-          </p:cNvSpPr>
-          <p:nvPr>
-            <p:ph sz="quarter" idx="4"/>
-          </p:nvPr>
-        </p:nvSpPr>
-        <p:spPr>
-          <a:xfrm>
-            <a:off x="636831" y="2612879"/>
-            <a:ext cx="5183188" cy="3684588"/>
-          </a:xfrm>
-        </p:spPr>
-        <p:txBody>
-          <a:bodyPr>
-            <a:normAutofit/>
-          </a:bodyPr>
-          <a:lstStyle/>
-          <a:p>
-            <a:pPr marL="0" indent="0">
-              <a:buNone/>
-            </a:pPr>
-            <a:r>
-              <a:rPr lang="pl-PL" sz="1600" dirty="0">
-                <a:solidFill>
-                  <a:srgbClr val="00A000"/>
-                </a:solidFill>
-                <a:latin typeface="Arial" panose="020B0604020202020204" pitchFamily="34" charset="0"/>
-                <a:cs typeface="Arial" panose="020B0604020202020204" pitchFamily="34" charset="0"/>
-              </a:rPr>
-              <a:t>✔</a:t>
-            </a:r>
-            <a:r>
-              <a:rPr lang="pl-PL" sz="1600" dirty="0">
-                <a:latin typeface="Arial" panose="020B0604020202020204" pitchFamily="34" charset="0"/>
-                <a:cs typeface="Arial" panose="020B0604020202020204" pitchFamily="34" charset="0"/>
-              </a:rPr>
-              <a:t> </a:t>
-            </a:r>
-            <a:r>
-              <a:rPr lang="pl-PL" sz="1600" dirty="0" err="1">
-                <a:latin typeface="Arial" panose="020B0604020202020204" pitchFamily="34" charset="0"/>
-                <a:cs typeface="Arial" panose="020B0604020202020204" pitchFamily="34" charset="0"/>
-              </a:rPr>
-              <a:t>LIFO</a:t>
-            </a:r>
-            <a:r>
-              <a:rPr lang="pl-PL" sz="1600" dirty="0">
-                <a:latin typeface="Arial" panose="020B0604020202020204" pitchFamily="34" charset="0"/>
-                <a:cs typeface="Arial" panose="020B0604020202020204" pitchFamily="34" charset="0"/>
-              </a:rPr>
-              <a:t> (</a:t>
-            </a:r>
-            <a:r>
-              <a:rPr lang="pl-PL" sz="1600" dirty="0" err="1">
-                <a:latin typeface="Arial" panose="020B0604020202020204" pitchFamily="34" charset="0"/>
-                <a:cs typeface="Arial" panose="020B0604020202020204" pitchFamily="34" charset="0"/>
-              </a:rPr>
-              <a:t>Last</a:t>
-            </a:r>
-            <a:r>
-              <a:rPr lang="pl-PL" sz="1600" dirty="0">
-                <a:latin typeface="Arial" panose="020B0604020202020204" pitchFamily="34" charset="0"/>
-                <a:cs typeface="Arial" panose="020B0604020202020204" pitchFamily="34" charset="0"/>
-              </a:rPr>
-              <a:t> In, First Out) </a:t>
-            </a:r>
-          </a:p>
-          <a:p>
-            <a:pPr marL="0" indent="0">
-              <a:buNone/>
-            </a:pPr>
-            <a:r>
-              <a:rPr lang="pl-PL" sz="1600" dirty="0">
-                <a:solidFill>
-                  <a:srgbClr val="00A000"/>
-                </a:solidFill>
-                <a:latin typeface="Arial" panose="020B0604020202020204" pitchFamily="34" charset="0"/>
-                <a:cs typeface="Arial" panose="020B0604020202020204" pitchFamily="34" charset="0"/>
-              </a:rPr>
-              <a:t>✔</a:t>
-            </a:r>
-            <a:r>
-              <a:rPr lang="pl-PL" sz="1600" dirty="0">
-                <a:latin typeface="Arial" panose="020B0604020202020204" pitchFamily="34" charset="0"/>
-                <a:cs typeface="Arial" panose="020B0604020202020204" pitchFamily="34" charset="0"/>
-              </a:rPr>
-              <a:t> proste operacje: </a:t>
-            </a:r>
-            <a:r>
-              <a:rPr lang="pl-PL" sz="1600" dirty="0" err="1">
-                <a:latin typeface="Arial" panose="020B0604020202020204" pitchFamily="34" charset="0"/>
-                <a:cs typeface="Arial" panose="020B0604020202020204" pitchFamily="34" charset="0"/>
-              </a:rPr>
-              <a:t>push</a:t>
-            </a:r>
-            <a:r>
-              <a:rPr lang="pl-PL" sz="1600" dirty="0">
-                <a:latin typeface="Arial" panose="020B0604020202020204" pitchFamily="34" charset="0"/>
-                <a:cs typeface="Arial" panose="020B0604020202020204" pitchFamily="34" charset="0"/>
-              </a:rPr>
-              <a:t>, pop</a:t>
-            </a:r>
-          </a:p>
-          <a:p>
-            <a:pPr marL="0" indent="0">
-              <a:buNone/>
-            </a:pPr>
-            <a:r>
-              <a:rPr lang="pl-PL" sz="1600" dirty="0">
-                <a:solidFill>
-                  <a:srgbClr val="00A000"/>
-                </a:solidFill>
-                <a:latin typeface="Arial" panose="020B0604020202020204" pitchFamily="34" charset="0"/>
-                <a:cs typeface="Arial" panose="020B0604020202020204" pitchFamily="34" charset="0"/>
-              </a:rPr>
-              <a:t>✔</a:t>
-            </a:r>
-            <a:r>
-              <a:rPr lang="pl-PL" sz="1600" dirty="0">
-                <a:latin typeface="Arial" panose="020B0604020202020204" pitchFamily="34" charset="0"/>
-                <a:cs typeface="Arial" panose="020B0604020202020204" pitchFamily="34" charset="0"/>
-              </a:rPr>
-              <a:t> złożoność operacji: O(1)</a:t>
-            </a:r>
-          </a:p>
-          <a:p>
-            <a:pPr marL="0" indent="0">
-              <a:buNone/>
-            </a:pPr>
-            <a:r>
-              <a:rPr lang="pl-PL" sz="1600" b="1" dirty="0">
-                <a:solidFill>
-                  <a:srgbClr val="FF0000"/>
-                </a:solidFill>
-                <a:latin typeface="Arial" panose="020B0604020202020204" pitchFamily="34" charset="0"/>
-                <a:cs typeface="Arial" panose="020B0604020202020204" pitchFamily="34" charset="0"/>
-              </a:rPr>
-              <a:t>⚠</a:t>
-            </a:r>
-            <a:r>
-              <a:rPr lang="pl-PL" sz="1600" dirty="0">
-                <a:latin typeface="Arial" panose="020B0604020202020204" pitchFamily="34" charset="0"/>
-                <a:cs typeface="Arial" panose="020B0604020202020204" pitchFamily="34" charset="0"/>
-              </a:rPr>
-              <a:t> brak elastycznego dostępu do środka;</a:t>
-            </a:r>
-            <a:br>
-              <a:rPr lang="pl-PL" sz="1600" dirty="0">
-                <a:latin typeface="Arial" panose="020B0604020202020204" pitchFamily="34" charset="0"/>
-                <a:cs typeface="Arial" panose="020B0604020202020204" pitchFamily="34" charset="0"/>
-              </a:rPr>
-            </a:br>
-            <a:r>
-              <a:rPr lang="pl-PL" sz="1600" dirty="0">
-                <a:latin typeface="Arial" panose="020B0604020202020204" pitchFamily="34" charset="0"/>
-                <a:cs typeface="Arial" panose="020B0604020202020204" pitchFamily="34" charset="0"/>
-              </a:rPr>
-              <a:t>obsługujemy tylko jeden koniec struktury</a:t>
-            </a:r>
-          </a:p>
-        </p:txBody>
-      </p:sp>
-    </p:spTree>
-    <p:extLst>
-      <p:ext uri="{BB962C8B-B14F-4D97-AF65-F5344CB8AC3E}">
-        <p14:creationId xmlns:p14="http://schemas.microsoft.com/office/powerpoint/2010/main" val="1337473844"/>
-      </p:ext>
-    </p:extLst>
-  </p:cSld>
-  <p:clrMapOvr>
-    <a:masterClrMapping/>
-  </p:clrMapOvr>
-</p:sld>
-</file>
-
-<file path=ppt/slides/slide30.xml><?xml version="1.0" encoding="utf-8"?>
+<file path=ppt/slides/slide31.xml><?xml version="1.0" encoding="utf-8"?>
 <p:sld xmlns:a="http://schemas.openxmlformats.org/drawingml/2006/main" xmlns:r="http://schemas.openxmlformats.org/officeDocument/2006/relationships" xmlns:p="http://schemas.openxmlformats.org/presentationml/2006/main">
   <p:cSld>
     <p:spTree>
@@ -12033,7 +12313,7 @@
 </p:sld>
 </file>
 
-<file path=ppt/slides/slide31.xml><?xml version="1.0" encoding="utf-8"?>
+<file path=ppt/slides/slide32.xml><?xml version="1.0" encoding="utf-8"?>
 <p:sld xmlns:a="http://schemas.openxmlformats.org/drawingml/2006/main" xmlns:r="http://schemas.openxmlformats.org/officeDocument/2006/relationships" xmlns:p="http://schemas.openxmlformats.org/presentationml/2006/main">
   <p:cSld>
     <p:spTree>
@@ -12187,7 +12467,7 @@
 </p:sld>
 </file>
 
-<file path=ppt/slides/slide32.xml><?xml version="1.0" encoding="utf-8"?>
+<file path=ppt/slides/slide33.xml><?xml version="1.0" encoding="utf-8"?>
 <p:sld xmlns:a="http://schemas.openxmlformats.org/drawingml/2006/main" xmlns:r="http://schemas.openxmlformats.org/officeDocument/2006/relationships" xmlns:p="http://schemas.openxmlformats.org/presentationml/2006/main">
   <p:cSld>
     <p:spTree>
@@ -12423,7 +12703,7 @@
 </p:sld>
 </file>
 
-<file path=ppt/slides/slide33.xml><?xml version="1.0" encoding="utf-8"?>
+<file path=ppt/slides/slide34.xml><?xml version="1.0" encoding="utf-8"?>
 <p:sld xmlns:a="http://schemas.openxmlformats.org/drawingml/2006/main" xmlns:r="http://schemas.openxmlformats.org/officeDocument/2006/relationships" xmlns:p="http://schemas.openxmlformats.org/presentationml/2006/main">
   <p:cSld>
     <p:spTree>
@@ -12578,7 +12858,7 @@
 </p:sld>
 </file>
 
-<file path=ppt/slides/slide34.xml><?xml version="1.0" encoding="utf-8"?>
+<file path=ppt/slides/slide35.xml><?xml version="1.0" encoding="utf-8"?>
 <p:sld xmlns:a="http://schemas.openxmlformats.org/drawingml/2006/main" xmlns:r="http://schemas.openxmlformats.org/officeDocument/2006/relationships" xmlns:p="http://schemas.openxmlformats.org/presentationml/2006/main">
   <p:cSld>
     <p:spTree>
@@ -12731,7 +13011,7 @@
 </p:sld>
 </file>
 
-<file path=ppt/slides/slide35.xml><?xml version="1.0" encoding="utf-8"?>
+<file path=ppt/slides/slide36.xml><?xml version="1.0" encoding="utf-8"?>
 <p:sld xmlns:a="http://schemas.openxmlformats.org/drawingml/2006/main" xmlns:r="http://schemas.openxmlformats.org/officeDocument/2006/relationships" xmlns:p="http://schemas.openxmlformats.org/presentationml/2006/main">
   <p:cSld>
     <p:spTree>
@@ -12939,7 +13219,7 @@
 </p:sld>
 </file>
 
-<file path=ppt/slides/slide36.xml><?xml version="1.0" encoding="utf-8"?>
+<file path=ppt/slides/slide37.xml><?xml version="1.0" encoding="utf-8"?>
 <p:sld xmlns:a="http://schemas.openxmlformats.org/drawingml/2006/main" xmlns:r="http://schemas.openxmlformats.org/officeDocument/2006/relationships" xmlns:p="http://schemas.openxmlformats.org/presentationml/2006/main">
   <p:cSld>
     <p:spTree>
@@ -13130,7 +13410,7 @@
 </p:sld>
 </file>
 
-<file path=ppt/slides/slide37.xml><?xml version="1.0" encoding="utf-8"?>
+<file path=ppt/slides/slide38.xml><?xml version="1.0" encoding="utf-8"?>
 <p:sld xmlns:a="http://schemas.openxmlformats.org/drawingml/2006/main" xmlns:r="http://schemas.openxmlformats.org/officeDocument/2006/relationships" xmlns:p="http://schemas.openxmlformats.org/presentationml/2006/main">
   <p:cSld>
     <p:spTree>
@@ -13602,7 +13882,7 @@
                 <a:latin typeface="Arial" panose="020B0604020202020204" pitchFamily="34" charset="0"/>
                 <a:cs typeface="Arial" panose="020B0604020202020204" pitchFamily="34" charset="0"/>
               </a:rPr>
-              <a:t>wartość …</a:t>
+              <a:t>wartość…</a:t>
             </a:r>
             <a:r>
               <a:rPr lang="pl-PL" sz="1200" dirty="0">
@@ -14615,7 +14895,13 @@
   <p:cSld>
     <p:spTree>
       <p:nvGrpSpPr>
-        <p:cNvPr id="1" name=""/>
+        <p:cNvPr id="1" name="">
+          <a:extLst>
+            <a:ext uri="{FF2B5EF4-FFF2-40B4-BE49-F238E27FC236}">
+              <a16:creationId xmlns:a16="http://schemas.microsoft.com/office/drawing/2014/main" id="{24B7810A-E817-EF05-E6F1-DE1471EE1E1D}"/>
+            </a:ext>
+          </a:extLst>
+        </p:cNvPr>
         <p:cNvGrpSpPr/>
         <p:nvPr/>
       </p:nvGrpSpPr>
@@ -14632,7 +14918,7 @@
           <p:cNvPr id="4" name="Tytuł 3">
             <a:extLst>
               <a:ext uri="{FF2B5EF4-FFF2-40B4-BE49-F238E27FC236}">
-                <a16:creationId xmlns:a16="http://schemas.microsoft.com/office/drawing/2014/main" id="{C1F483C1-7FBE-A421-5A4F-53D7EC593AB1}"/>
+                <a16:creationId xmlns:a16="http://schemas.microsoft.com/office/drawing/2014/main" id="{4E86B36C-EA55-2FB3-1F33-AD4699025402}"/>
               </a:ext>
             </a:extLst>
           </p:cNvPr>
@@ -14643,7 +14929,12 @@
             <p:ph type="title"/>
           </p:nvPr>
         </p:nvSpPr>
-        <p:spPr/>
+        <p:spPr>
+          <a:xfrm>
+            <a:off x="838200" y="141190"/>
+            <a:ext cx="10515600" cy="1325563"/>
+          </a:xfrm>
+        </p:spPr>
         <p:txBody>
           <a:bodyPr>
             <a:normAutofit/>
@@ -14652,145 +14943,455 @@
           <a:p>
             <a:pPr algn="ctr"/>
             <a:r>
-              <a:rPr lang="pl-PL" sz="4000" b="1" dirty="0" err="1">
-                <a:latin typeface="Arial" panose="020B0604020202020204" pitchFamily="34" charset="0"/>
-                <a:cs typeface="Arial" panose="020B0604020202020204" pitchFamily="34" charset="0"/>
-              </a:rPr>
-              <a:t>HashTable</a:t>
-            </a:r>
-            <a:r>
-              <a:rPr lang="pl-PL" sz="4000" b="1" dirty="0">
-                <a:latin typeface="Arial" panose="020B0604020202020204" pitchFamily="34" charset="0"/>
-                <a:cs typeface="Arial" panose="020B0604020202020204" pitchFamily="34" charset="0"/>
-              </a:rPr>
-              <a:t> – koncept</a:t>
-            </a:r>
+              <a:rPr lang="pl-PL" sz="3600" b="1" dirty="0" err="1">
+                <a:latin typeface="Arial" panose="020B0604020202020204" pitchFamily="34" charset="0"/>
+                <a:cs typeface="Arial" panose="020B0604020202020204" pitchFamily="34" charset="0"/>
+              </a:rPr>
+              <a:t>BST</a:t>
+            </a:r>
+            <a:r>
+              <a:rPr lang="pl-PL" sz="3600" b="1" dirty="0">
+                <a:latin typeface="Arial" panose="020B0604020202020204" pitchFamily="34" charset="0"/>
+                <a:cs typeface="Arial" panose="020B0604020202020204" pitchFamily="34" charset="0"/>
+              </a:rPr>
+              <a:t> – mechanizm rotacji</a:t>
+            </a:r>
+            <a:endParaRPr lang="pl-PL" sz="1600" b="1" dirty="0">
+              <a:latin typeface="Arial" panose="020B0604020202020204" pitchFamily="34" charset="0"/>
+              <a:cs typeface="Arial" panose="020B0604020202020204" pitchFamily="34" charset="0"/>
+            </a:endParaRPr>
           </a:p>
         </p:txBody>
       </p:sp>
-      <p:sp>
-        <p:nvSpPr>
-          <p:cNvPr id="5" name="Symbol zastępczy zawartości 4">
+      <p:pic>
+        <p:nvPicPr>
+          <p:cNvPr id="5" name="Obraz 4">
             <a:extLst>
               <a:ext uri="{FF2B5EF4-FFF2-40B4-BE49-F238E27FC236}">
-                <a16:creationId xmlns:a16="http://schemas.microsoft.com/office/drawing/2014/main" id="{336F499D-5039-FEC0-72BA-478C8AC214B8}"/>
+                <a16:creationId xmlns:a16="http://schemas.microsoft.com/office/drawing/2014/main" id="{9E2E16FB-E366-907E-DC51-7C4A2B715A60}"/>
               </a:ext>
             </a:extLst>
           </p:cNvPr>
-          <p:cNvSpPr>
-            <a:spLocks noGrp="1"/>
-          </p:cNvSpPr>
-          <p:nvPr>
-            <p:ph sz="half" idx="1"/>
-          </p:nvPr>
+          <p:cNvPicPr>
+            <a:picLocks noChangeAspect="1"/>
+          </p:cNvPicPr>
+          <p:nvPr/>
+        </p:nvPicPr>
+        <p:blipFill>
+          <a:blip r:embed="rId2"/>
+          <a:stretch>
+            <a:fillRect/>
+          </a:stretch>
+        </p:blipFill>
+        <p:spPr>
+          <a:xfrm>
+            <a:off x="8349343" y="1783994"/>
+            <a:ext cx="2829320" cy="1647207"/>
+          </a:xfrm>
+          <a:prstGeom prst="rect">
+            <a:avLst/>
+          </a:prstGeom>
+        </p:spPr>
+      </p:pic>
+      <p:sp>
+        <p:nvSpPr>
+          <p:cNvPr id="6" name="pole tekstowe 5">
+            <a:extLst>
+              <a:ext uri="{FF2B5EF4-FFF2-40B4-BE49-F238E27FC236}">
+                <a16:creationId xmlns:a16="http://schemas.microsoft.com/office/drawing/2014/main" id="{02764338-5161-928F-F424-1ADCC0714AF6}"/>
+              </a:ext>
+            </a:extLst>
+          </p:cNvPr>
+          <p:cNvSpPr txBox="1"/>
+          <p:nvPr/>
         </p:nvSpPr>
-        <p:spPr/>
+        <p:spPr>
+          <a:xfrm>
+            <a:off x="3891599" y="1779687"/>
+            <a:ext cx="4233665" cy="4893647"/>
+          </a:xfrm>
+          <a:prstGeom prst="rect">
+            <a:avLst/>
+          </a:prstGeom>
+          <a:noFill/>
+        </p:spPr>
         <p:txBody>
-          <a:bodyPr>
-            <a:normAutofit/>
+          <a:bodyPr wrap="square" rtlCol="0">
+            <a:spAutoFit/>
           </a:bodyPr>
           <a:lstStyle/>
           <a:p>
-            <a:pPr>
-              <a:buFont typeface="Wingdings" panose="05000000000000000000" pitchFamily="2" charset="2"/>
-              <a:buChar char="Ø"/>
-            </a:pPr>
-            <a:r>
-              <a:rPr lang="pl-PL" sz="1600" b="1" dirty="0" err="1"/>
-              <a:t>HashTable</a:t>
-            </a:r>
-            <a:r>
-              <a:rPr lang="pl-PL" sz="1600" dirty="0"/>
-              <a:t> </a:t>
-            </a:r>
-            <a:r>
-              <a:rPr lang="pl-PL" sz="1600" u="sng" dirty="0">
-                <a:solidFill>
-                  <a:srgbClr val="FF0000"/>
-                </a:solidFill>
-              </a:rPr>
-              <a:t>nie</a:t>
-            </a:r>
-            <a:r>
-              <a:rPr lang="pl-PL" sz="1600" dirty="0"/>
-              <a:t> jest konkretną implementacją, lecz ogólną strukturą danych (konceptem) opartą na haszowaniu.</a:t>
-            </a:r>
-          </a:p>
-          <a:p>
-            <a:pPr>
-              <a:buFont typeface="Wingdings" panose="05000000000000000000" pitchFamily="2" charset="2"/>
-              <a:buChar char="Ø"/>
-            </a:pPr>
-            <a:r>
-              <a:rPr lang="pl-PL" sz="1600" dirty="0"/>
-              <a:t>Faktycznymi strukturami danych implementującymi ten koncept są:</a:t>
-            </a:r>
+            <a:r>
+              <a:rPr lang="pl-PL" sz="1200" b="1" dirty="0">
+                <a:latin typeface="Arial" panose="020B0604020202020204" pitchFamily="34" charset="0"/>
+                <a:cs typeface="Arial" panose="020B0604020202020204" pitchFamily="34" charset="0"/>
+              </a:rPr>
+              <a:t>W celu demonstracji następującego kodu, wykonamy </a:t>
+            </a:r>
+            <a:r>
+              <a:rPr lang="pl-PL" sz="1200" b="1" dirty="0" err="1">
+                <a:latin typeface="Arial" panose="020B0604020202020204" pitchFamily="34" charset="0"/>
+                <a:cs typeface="Arial" panose="020B0604020202020204" pitchFamily="34" charset="0"/>
+              </a:rPr>
+              <a:t>right_rotate</a:t>
+            </a:r>
+            <a:r>
+              <a:rPr lang="pl-PL" sz="1200" b="1" dirty="0">
+                <a:latin typeface="Arial" panose="020B0604020202020204" pitchFamily="34" charset="0"/>
+                <a:cs typeface="Arial" panose="020B0604020202020204" pitchFamily="34" charset="0"/>
+              </a:rPr>
+              <a:t> na przykładowym elemencie y=2.</a:t>
+            </a:r>
+            <a:br>
+              <a:rPr lang="pl-PL" sz="1200" b="1" dirty="0">
+                <a:latin typeface="Arial" panose="020B0604020202020204" pitchFamily="34" charset="0"/>
+                <a:cs typeface="Arial" panose="020B0604020202020204" pitchFamily="34" charset="0"/>
+              </a:rPr>
+            </a:br>
+            <a:r>
+              <a:rPr lang="pl-PL" sz="1200" b="1" dirty="0">
+                <a:latin typeface="Arial" panose="020B0604020202020204" pitchFamily="34" charset="0"/>
+                <a:cs typeface="Arial" panose="020B0604020202020204" pitchFamily="34" charset="0"/>
+              </a:rPr>
+              <a:t>Mechanizm rotacji lewo- lub prawoskrętnej jest wykorzystywany m.in. w </a:t>
+            </a:r>
+            <a:r>
+              <a:rPr lang="pl-PL" sz="1200" b="1" u="sng" dirty="0">
+                <a:latin typeface="Arial" panose="020B0604020202020204" pitchFamily="34" charset="0"/>
+                <a:cs typeface="Arial" panose="020B0604020202020204" pitchFamily="34" charset="0"/>
+              </a:rPr>
+              <a:t>drzewach czerwono-czarnych</a:t>
+            </a:r>
+            <a:r>
+              <a:rPr lang="pl-PL" sz="1200" u="sng" dirty="0">
+                <a:latin typeface="Arial" panose="020B0604020202020204" pitchFamily="34" charset="0"/>
+                <a:cs typeface="Arial" panose="020B0604020202020204" pitchFamily="34" charset="0"/>
+              </a:rPr>
+              <a:t>.</a:t>
+            </a:r>
+            <a:br>
+              <a:rPr lang="pl-PL" sz="1200" b="1" dirty="0">
+                <a:latin typeface="Arial" panose="020B0604020202020204" pitchFamily="34" charset="0"/>
+                <a:cs typeface="Arial" panose="020B0604020202020204" pitchFamily="34" charset="0"/>
+              </a:rPr>
+            </a:br>
+            <a:r>
+              <a:rPr lang="pl-PL" sz="1200" b="1" dirty="0">
+                <a:latin typeface="Arial" panose="020B0604020202020204" pitchFamily="34" charset="0"/>
+                <a:cs typeface="Arial" panose="020B0604020202020204" pitchFamily="34" charset="0"/>
+              </a:rPr>
+              <a:t>Oto następujące kroki algorytmu:</a:t>
+            </a:r>
+            <a:br>
+              <a:rPr lang="pl-PL" sz="1200" dirty="0">
+                <a:latin typeface="Arial" panose="020B0604020202020204" pitchFamily="34" charset="0"/>
+                <a:cs typeface="Arial" panose="020B0604020202020204" pitchFamily="34" charset="0"/>
+              </a:rPr>
+            </a:br>
+            <a:br>
+              <a:rPr lang="pl-PL" sz="1200" dirty="0">
+                <a:latin typeface="Arial" panose="020B0604020202020204" pitchFamily="34" charset="0"/>
+                <a:cs typeface="Arial" panose="020B0604020202020204" pitchFamily="34" charset="0"/>
+              </a:rPr>
+            </a:br>
+            <a:r>
+              <a:rPr lang="pl-PL" sz="1200" strike="sngStrike" dirty="0">
+                <a:latin typeface="Arial" panose="020B0604020202020204" pitchFamily="34" charset="0"/>
+                <a:cs typeface="Arial" panose="020B0604020202020204" pitchFamily="34" charset="0"/>
+              </a:rPr>
+              <a:t>x=1 (lewe dziecko elementu y=2)</a:t>
+            </a:r>
+            <a:br>
+              <a:rPr lang="pl-PL" sz="1200" strike="sngStrike" dirty="0">
+                <a:latin typeface="Arial" panose="020B0604020202020204" pitchFamily="34" charset="0"/>
+                <a:cs typeface="Arial" panose="020B0604020202020204" pitchFamily="34" charset="0"/>
+              </a:rPr>
+            </a:br>
+            <a:r>
+              <a:rPr lang="pl-PL" sz="1200" strike="sngStrike" dirty="0" err="1">
+                <a:latin typeface="Arial" panose="020B0604020202020204" pitchFamily="34" charset="0"/>
+                <a:cs typeface="Arial" panose="020B0604020202020204" pitchFamily="34" charset="0"/>
+              </a:rPr>
+              <a:t>y.left</a:t>
+            </a:r>
+            <a:r>
+              <a:rPr lang="pl-PL" sz="1200" strike="sngStrike" dirty="0">
+                <a:latin typeface="Arial" panose="020B0604020202020204" pitchFamily="34" charset="0"/>
+                <a:cs typeface="Arial" panose="020B0604020202020204" pitchFamily="34" charset="0"/>
+              </a:rPr>
+              <a:t> = </a:t>
+            </a:r>
+            <a:r>
+              <a:rPr lang="pl-PL" sz="1200" strike="sngStrike" dirty="0" err="1">
+                <a:latin typeface="Arial" panose="020B0604020202020204" pitchFamily="34" charset="0"/>
+                <a:cs typeface="Arial" panose="020B0604020202020204" pitchFamily="34" charset="0"/>
+              </a:rPr>
+              <a:t>x.right</a:t>
+            </a:r>
+            <a:r>
+              <a:rPr lang="pl-PL" sz="1200" strike="sngStrike" dirty="0">
+                <a:latin typeface="Arial" panose="020B0604020202020204" pitchFamily="34" charset="0"/>
+                <a:cs typeface="Arial" panose="020B0604020202020204" pitchFamily="34" charset="0"/>
+              </a:rPr>
+              <a:t> = NIL (element 1 nie ma prawego dziecka)</a:t>
+            </a:r>
+            <a:br>
+              <a:rPr lang="pl-PL" sz="1200" strike="sngStrike" dirty="0">
+                <a:latin typeface="Arial" panose="020B0604020202020204" pitchFamily="34" charset="0"/>
+                <a:cs typeface="Arial" panose="020B0604020202020204" pitchFamily="34" charset="0"/>
+              </a:rPr>
+            </a:br>
+            <a:br>
+              <a:rPr lang="pl-PL" sz="1200" strike="sngStrike" dirty="0">
+                <a:latin typeface="Arial" panose="020B0604020202020204" pitchFamily="34" charset="0"/>
+                <a:cs typeface="Arial" panose="020B0604020202020204" pitchFamily="34" charset="0"/>
+              </a:rPr>
+            </a:br>
+            <a:r>
+              <a:rPr lang="pl-PL" sz="1200" i="1" strike="sngStrike" dirty="0">
+                <a:latin typeface="Arial" panose="020B0604020202020204" pitchFamily="34" charset="0"/>
+                <a:cs typeface="Arial" panose="020B0604020202020204" pitchFamily="34" charset="0"/>
+              </a:rPr>
+              <a:t>Pierwsza funkcja </a:t>
+            </a:r>
+            <a:r>
+              <a:rPr lang="pl-PL" sz="1200" i="1" strike="sngStrike" dirty="0" err="1">
+                <a:latin typeface="Arial" panose="020B0604020202020204" pitchFamily="34" charset="0"/>
+                <a:cs typeface="Arial" panose="020B0604020202020204" pitchFamily="34" charset="0"/>
+              </a:rPr>
+              <a:t>if</a:t>
+            </a:r>
+            <a:r>
+              <a:rPr lang="pl-PL" sz="1200" i="1" strike="sngStrike" dirty="0">
+                <a:latin typeface="Arial" panose="020B0604020202020204" pitchFamily="34" charset="0"/>
+                <a:cs typeface="Arial" panose="020B0604020202020204" pitchFamily="34" charset="0"/>
+              </a:rPr>
+              <a:t> nie wykonuje się (</a:t>
+            </a:r>
+            <a:r>
+              <a:rPr lang="pl-PL" sz="1200" i="1" strike="sngStrike" dirty="0" err="1">
+                <a:latin typeface="Arial" panose="020B0604020202020204" pitchFamily="34" charset="0"/>
+                <a:cs typeface="Arial" panose="020B0604020202020204" pitchFamily="34" charset="0"/>
+              </a:rPr>
+              <a:t>x.right</a:t>
+            </a:r>
+            <a:r>
+              <a:rPr lang="pl-PL" sz="1200" i="1" strike="sngStrike" dirty="0">
+                <a:latin typeface="Arial" panose="020B0604020202020204" pitchFamily="34" charset="0"/>
+                <a:cs typeface="Arial" panose="020B0604020202020204" pitchFamily="34" charset="0"/>
+              </a:rPr>
+              <a:t> = NIL)</a:t>
+            </a:r>
+            <a:r>
+              <a:rPr lang="pl-PL" sz="1200" strike="sngStrike" dirty="0">
+                <a:latin typeface="Arial" panose="020B0604020202020204" pitchFamily="34" charset="0"/>
+                <a:cs typeface="Arial" panose="020B0604020202020204" pitchFamily="34" charset="0"/>
+              </a:rPr>
+              <a:t>.</a:t>
+            </a:r>
+            <a:br>
+              <a:rPr lang="pl-PL" sz="1200" strike="sngStrike" dirty="0">
+                <a:latin typeface="Arial" panose="020B0604020202020204" pitchFamily="34" charset="0"/>
+                <a:cs typeface="Arial" panose="020B0604020202020204" pitchFamily="34" charset="0"/>
+              </a:rPr>
+            </a:br>
+            <a:br>
+              <a:rPr lang="pl-PL" sz="1200" strike="sngStrike" dirty="0">
+                <a:latin typeface="Arial" panose="020B0604020202020204" pitchFamily="34" charset="0"/>
+                <a:cs typeface="Arial" panose="020B0604020202020204" pitchFamily="34" charset="0"/>
+              </a:rPr>
+            </a:br>
+            <a:r>
+              <a:rPr lang="pl-PL" sz="1200" strike="sngStrike" dirty="0" err="1">
+                <a:latin typeface="Arial" panose="020B0604020202020204" pitchFamily="34" charset="0"/>
+                <a:cs typeface="Arial" panose="020B0604020202020204" pitchFamily="34" charset="0"/>
+              </a:rPr>
+              <a:t>x.parent</a:t>
+            </a:r>
+            <a:r>
+              <a:rPr lang="pl-PL" sz="1200" strike="sngStrike" dirty="0">
+                <a:latin typeface="Arial" panose="020B0604020202020204" pitchFamily="34" charset="0"/>
+                <a:cs typeface="Arial" panose="020B0604020202020204" pitchFamily="34" charset="0"/>
+              </a:rPr>
+              <a:t> = </a:t>
+            </a:r>
+            <a:r>
+              <a:rPr lang="pl-PL" sz="1200" strike="sngStrike" dirty="0" err="1">
+                <a:latin typeface="Arial" panose="020B0604020202020204" pitchFamily="34" charset="0"/>
+                <a:cs typeface="Arial" panose="020B0604020202020204" pitchFamily="34" charset="0"/>
+              </a:rPr>
+              <a:t>y.parent</a:t>
+            </a:r>
+            <a:r>
+              <a:rPr lang="pl-PL" sz="1200" strike="sngStrike" dirty="0">
+                <a:latin typeface="Arial" panose="020B0604020202020204" pitchFamily="34" charset="0"/>
+                <a:cs typeface="Arial" panose="020B0604020202020204" pitchFamily="34" charset="0"/>
+              </a:rPr>
+              <a:t> = 4 (</a:t>
+            </a:r>
+            <a:r>
+              <a:rPr lang="pl-PL" sz="1200" strike="sngStrike" dirty="0" err="1">
+                <a:latin typeface="Arial" panose="020B0604020202020204" pitchFamily="34" charset="0"/>
+                <a:cs typeface="Arial" panose="020B0604020202020204" pitchFamily="34" charset="0"/>
+              </a:rPr>
+              <a:t>x.parent</a:t>
+            </a:r>
+            <a:r>
+              <a:rPr lang="pl-PL" sz="1200" strike="sngStrike" dirty="0">
+                <a:latin typeface="Arial" panose="020B0604020202020204" pitchFamily="34" charset="0"/>
+                <a:cs typeface="Arial" panose="020B0604020202020204" pitchFamily="34" charset="0"/>
+              </a:rPr>
+              <a:t> zostaje ustawiony na rodzica y, czyli 4)</a:t>
+            </a:r>
+            <a:br>
+              <a:rPr lang="pl-PL" sz="1200" strike="sngStrike" dirty="0">
+                <a:latin typeface="Arial" panose="020B0604020202020204" pitchFamily="34" charset="0"/>
+                <a:cs typeface="Arial" panose="020B0604020202020204" pitchFamily="34" charset="0"/>
+              </a:rPr>
+            </a:br>
+            <a:br>
+              <a:rPr lang="pl-PL" sz="1200" strike="sngStrike" dirty="0">
+                <a:latin typeface="Arial" panose="020B0604020202020204" pitchFamily="34" charset="0"/>
+                <a:cs typeface="Arial" panose="020B0604020202020204" pitchFamily="34" charset="0"/>
+              </a:rPr>
+            </a:br>
+            <a:r>
+              <a:rPr lang="pl-PL" sz="1200" strike="sngStrike" dirty="0">
+                <a:latin typeface="Arial" panose="020B0604020202020204" pitchFamily="34" charset="0"/>
+                <a:cs typeface="Arial" panose="020B0604020202020204" pitchFamily="34" charset="0"/>
+              </a:rPr>
+              <a:t>Element y=2 był lewym dzieckiem, zatem wykona się warunek </a:t>
+            </a:r>
+            <a:r>
+              <a:rPr lang="pl-PL" sz="1200" strike="sngStrike" dirty="0" err="1">
+                <a:latin typeface="Arial" panose="020B0604020202020204" pitchFamily="34" charset="0"/>
+                <a:cs typeface="Arial" panose="020B0604020202020204" pitchFamily="34" charset="0"/>
+              </a:rPr>
+              <a:t>else</a:t>
+            </a:r>
+            <a:r>
+              <a:rPr lang="pl-PL" sz="1200" strike="sngStrike" dirty="0">
+                <a:latin typeface="Arial" panose="020B0604020202020204" pitchFamily="34" charset="0"/>
+                <a:cs typeface="Arial" panose="020B0604020202020204" pitchFamily="34" charset="0"/>
+              </a:rPr>
+              <a:t> – element x=1 stanie się lewym dzieckiem elementu 4.</a:t>
+            </a:r>
+            <a:br>
+              <a:rPr lang="pl-PL" sz="1200" strike="sngStrike" dirty="0">
+                <a:latin typeface="Arial" panose="020B0604020202020204" pitchFamily="34" charset="0"/>
+                <a:cs typeface="Arial" panose="020B0604020202020204" pitchFamily="34" charset="0"/>
+              </a:rPr>
+            </a:br>
+            <a:br>
+              <a:rPr lang="pl-PL" sz="1200" strike="sngStrike" dirty="0">
+                <a:latin typeface="Arial" panose="020B0604020202020204" pitchFamily="34" charset="0"/>
+                <a:cs typeface="Arial" panose="020B0604020202020204" pitchFamily="34" charset="0"/>
+              </a:rPr>
+            </a:br>
+            <a:r>
+              <a:rPr lang="pl-PL" sz="1200" strike="sngStrike" dirty="0">
+                <a:latin typeface="Arial" panose="020B0604020202020204" pitchFamily="34" charset="0"/>
+                <a:cs typeface="Arial" panose="020B0604020202020204" pitchFamily="34" charset="0"/>
+              </a:rPr>
+              <a:t>Na sam koniec:</a:t>
+            </a:r>
+            <a:br>
+              <a:rPr lang="pl-PL" sz="1200" strike="sngStrike" dirty="0">
+                <a:latin typeface="Arial" panose="020B0604020202020204" pitchFamily="34" charset="0"/>
+                <a:cs typeface="Arial" panose="020B0604020202020204" pitchFamily="34" charset="0"/>
+              </a:rPr>
+            </a:br>
+            <a:r>
+              <a:rPr lang="pl-PL" sz="1200" strike="sngStrike" dirty="0">
+                <a:latin typeface="Arial" panose="020B0604020202020204" pitchFamily="34" charset="0"/>
+                <a:cs typeface="Arial" panose="020B0604020202020204" pitchFamily="34" charset="0"/>
+              </a:rPr>
+              <a:t>   element y=2 zostaje prawym dzieckiem elementu x=1</a:t>
+            </a:r>
+            <a:br>
+              <a:rPr lang="pl-PL" sz="1200" strike="sngStrike" dirty="0">
+                <a:latin typeface="Arial" panose="020B0604020202020204" pitchFamily="34" charset="0"/>
+                <a:cs typeface="Arial" panose="020B0604020202020204" pitchFamily="34" charset="0"/>
+              </a:rPr>
+            </a:br>
+            <a:r>
+              <a:rPr lang="pl-PL" sz="1200" strike="sngStrike" dirty="0">
+                <a:latin typeface="Arial" panose="020B0604020202020204" pitchFamily="34" charset="0"/>
+                <a:cs typeface="Arial" panose="020B0604020202020204" pitchFamily="34" charset="0"/>
+              </a:rPr>
+              <a:t>   element x=1 zostanie rodzicem elementu y</a:t>
+            </a:r>
+            <a:br>
+              <a:rPr lang="pl-PL" sz="1200" dirty="0">
+                <a:latin typeface="Arial" panose="020B0604020202020204" pitchFamily="34" charset="0"/>
+                <a:cs typeface="Arial" panose="020B0604020202020204" pitchFamily="34" charset="0"/>
+              </a:rPr>
+            </a:br>
+            <a:br>
+              <a:rPr lang="pl-PL" sz="1200" dirty="0">
+                <a:latin typeface="Arial" panose="020B0604020202020204" pitchFamily="34" charset="0"/>
+                <a:cs typeface="Arial" panose="020B0604020202020204" pitchFamily="34" charset="0"/>
+              </a:rPr>
+            </a:br>
+            <a:br>
+              <a:rPr lang="pl-PL" sz="1200" dirty="0">
+                <a:latin typeface="Arial" panose="020B0604020202020204" pitchFamily="34" charset="0"/>
+                <a:cs typeface="Arial" panose="020B0604020202020204" pitchFamily="34" charset="0"/>
+              </a:rPr>
+            </a:br>
+            <a:br>
+              <a:rPr lang="pl-PL" sz="1200" dirty="0">
+                <a:latin typeface="Arial" panose="020B0604020202020204" pitchFamily="34" charset="0"/>
+                <a:cs typeface="Arial" panose="020B0604020202020204" pitchFamily="34" charset="0"/>
+              </a:rPr>
+            </a:br>
+            <a:br>
+              <a:rPr lang="pl-PL" sz="1200" dirty="0">
+                <a:latin typeface="Arial" panose="020B0604020202020204" pitchFamily="34" charset="0"/>
+                <a:cs typeface="Arial" panose="020B0604020202020204" pitchFamily="34" charset="0"/>
+              </a:rPr>
+            </a:br>
             <a:endParaRPr lang="pl-PL" sz="1200" dirty="0">
               <a:latin typeface="Arial" panose="020B0604020202020204" pitchFamily="34" charset="0"/>
               <a:cs typeface="Arial" panose="020B0604020202020204" pitchFamily="34" charset="0"/>
             </a:endParaRPr>
           </a:p>
-          <a:p>
-            <a:pPr lvl="1">
-              <a:buFont typeface="Wingdings" panose="05000000000000000000" pitchFamily="2" charset="2"/>
-              <a:buChar char="Ø"/>
-            </a:pPr>
-            <a:r>
-              <a:rPr lang="pl-PL" sz="1200" b="1" dirty="0" err="1">
-                <a:latin typeface="Arial" panose="020B0604020202020204" pitchFamily="34" charset="0"/>
-                <a:cs typeface="Arial" panose="020B0604020202020204" pitchFamily="34" charset="0"/>
-              </a:rPr>
-              <a:t>HashMap</a:t>
-            </a:r>
-            <a:r>
-              <a:rPr lang="pl-PL" sz="1200" b="1" dirty="0">
-                <a:latin typeface="Arial" panose="020B0604020202020204" pitchFamily="34" charset="0"/>
-                <a:cs typeface="Arial" panose="020B0604020202020204" pitchFamily="34" charset="0"/>
-              </a:rPr>
-              <a:t> (</a:t>
-            </a:r>
-            <a:r>
-              <a:rPr lang="pl-PL" sz="1200" b="1" dirty="0" err="1">
-                <a:latin typeface="Arial" panose="020B0604020202020204" pitchFamily="34" charset="0"/>
-                <a:cs typeface="Arial" panose="020B0604020202020204" pitchFamily="34" charset="0"/>
-              </a:rPr>
-              <a:t>dict</a:t>
-            </a:r>
-            <a:r>
-              <a:rPr lang="pl-PL" sz="1200" b="1" dirty="0">
-                <a:latin typeface="Arial" panose="020B0604020202020204" pitchFamily="34" charset="0"/>
-                <a:cs typeface="Arial" panose="020B0604020202020204" pitchFamily="34" charset="0"/>
-              </a:rPr>
-              <a:t>)</a:t>
-            </a:r>
-          </a:p>
-          <a:p>
-            <a:pPr lvl="1">
-              <a:buFont typeface="Wingdings" panose="05000000000000000000" pitchFamily="2" charset="2"/>
-              <a:buChar char="Ø"/>
-            </a:pPr>
-            <a:r>
-              <a:rPr lang="pl-PL" sz="1200" b="1" dirty="0" err="1">
-                <a:latin typeface="Arial" panose="020B0604020202020204" pitchFamily="34" charset="0"/>
-                <a:cs typeface="Arial" panose="020B0604020202020204" pitchFamily="34" charset="0"/>
-              </a:rPr>
-              <a:t>HashSet</a:t>
-            </a:r>
-            <a:r>
-              <a:rPr lang="pl-PL" sz="1200" b="1" dirty="0">
-                <a:latin typeface="Arial" panose="020B0604020202020204" pitchFamily="34" charset="0"/>
-                <a:cs typeface="Arial" panose="020B0604020202020204" pitchFamily="34" charset="0"/>
-              </a:rPr>
-              <a:t> (set)</a:t>
-            </a:r>
-            <a:endParaRPr lang="pl-PL" sz="1200" b="1" dirty="0"/>
-          </a:p>
         </p:txBody>
       </p:sp>
+      <p:pic>
+        <p:nvPicPr>
+          <p:cNvPr id="8" name="Obraz 7">
+            <a:extLst>
+              <a:ext uri="{FF2B5EF4-FFF2-40B4-BE49-F238E27FC236}">
+                <a16:creationId xmlns:a16="http://schemas.microsoft.com/office/drawing/2014/main" id="{1B84CA04-D214-D825-A0BB-E6ED6519CEBD}"/>
+              </a:ext>
+            </a:extLst>
+          </p:cNvPr>
+          <p:cNvPicPr>
+            <a:picLocks noChangeAspect="1"/>
+          </p:cNvPicPr>
+          <p:nvPr/>
+        </p:nvPicPr>
+        <p:blipFill>
+          <a:blip r:embed="rId3"/>
+          <a:stretch>
+            <a:fillRect/>
+          </a:stretch>
+        </p:blipFill>
+        <p:spPr>
+          <a:xfrm>
+            <a:off x="838200" y="1783994"/>
+            <a:ext cx="2829320" cy="4610743"/>
+          </a:xfrm>
+          <a:prstGeom prst="rect">
+            <a:avLst/>
+          </a:prstGeom>
+        </p:spPr>
+      </p:pic>
     </p:spTree>
     <p:extLst>
       <p:ext uri="{BB962C8B-B14F-4D97-AF65-F5344CB8AC3E}">
-        <p14:creationId xmlns:p14="http://schemas.microsoft.com/office/powerpoint/2010/main" val="988880070"/>
+        <p14:creationId xmlns:p14="http://schemas.microsoft.com/office/powerpoint/2010/main" val="1383295579"/>
       </p:ext>
     </p:extLst>
   </p:cSld>
